--- a/slides/Hotel-Booking-Cancellation-Prediction.pptx
+++ b/slides/Hotel-Booking-Cancellation-Prediction.pptx
@@ -4724,6 +4724,8 @@
                   <a:srgbClr val="E0A458"/>
                 </a:solidFill>
                 <a:latin typeface="Tahoma"/>
+                <a:ea typeface="Tahoma"/>
+                <a:cs typeface="Tahoma"/>
               </a:rPr>
               <a:t>โครงงานรายวิชา Machine Learning</a:t>
             </a:r>
@@ -4766,6 +4768,8 @@
                   <a:srgbClr val="FFFFFF"/>
                 </a:solidFill>
                 <a:latin typeface="Tahoma"/>
+                <a:ea typeface="Tahoma"/>
+                <a:cs typeface="Tahoma"/>
               </a:rPr>
               <a:t>Hotel Booking
 Cancellation Prediction</a:t>
@@ -4809,6 +4813,8 @@
                   <a:srgbClr val="C7D2DE"/>
                 </a:solidFill>
                 <a:latin typeface="Tahoma"/>
+                <a:ea typeface="Tahoma"/>
+                <a:cs typeface="Tahoma"/>
               </a:rPr>
               <a:t>ทำนายความเสี่ยงที่การจองโรงแรมจะถูกยกเลิก ด้วยข้อมูลการจองจริง 119,208 รายการ</a:t>
             </a:r>
@@ -4851,6 +4857,8 @@
                   <a:srgbClr val="E4EAF1"/>
                 </a:solidFill>
                 <a:latin typeface="Tahoma"/>
+                <a:ea typeface="Tahoma"/>
+                <a:cs typeface="Tahoma"/>
               </a:rPr>
               <a:t>นายชัยพร ศรีพราย  66114540168</a:t>
             </a:r>
@@ -4870,6 +4878,8 @@
                   <a:srgbClr val="E4EAF1"/>
                 </a:solidFill>
                 <a:latin typeface="Tahoma"/>
+                <a:ea typeface="Tahoma"/>
+                <a:cs typeface="Tahoma"/>
               </a:rPr>
               <a:t>นางสาวกวิณชฎา มีศรี  67114540015</a:t>
             </a:r>
@@ -4889,6 +4899,8 @@
                   <a:srgbClr val="E4EAF1"/>
                 </a:solidFill>
                 <a:latin typeface="Tahoma"/>
+                <a:ea typeface="Tahoma"/>
+                <a:cs typeface="Tahoma"/>
               </a:rPr>
               <a:t>นายธนากร ไชยรัตน์  67114540244</a:t>
             </a:r>
@@ -4931,6 +4943,8 @@
                   <a:srgbClr val="E4EAF1"/>
                 </a:solidFill>
                 <a:latin typeface="Tahoma"/>
+                <a:ea typeface="Tahoma"/>
+                <a:cs typeface="Tahoma"/>
               </a:rPr>
               <a:t>นายรัชชานนท์ รื่นจิตต์  67114540446</a:t>
             </a:r>
@@ -4950,6 +4964,8 @@
                   <a:srgbClr val="E4EAF1"/>
                 </a:solidFill>
                 <a:latin typeface="Tahoma"/>
+                <a:ea typeface="Tahoma"/>
+                <a:cs typeface="Tahoma"/>
               </a:rPr>
               <a:t>นายราชภัฏ บุญรอด  67114540455</a:t>
             </a:r>
@@ -5038,6 +5054,8 @@
                   <a:srgbClr val="E0A458"/>
                 </a:solidFill>
                 <a:latin typeface="Tahoma"/>
+                <a:ea typeface="Tahoma"/>
+                <a:cs typeface="Tahoma"/>
               </a:rPr>
               <a:t>18</a:t>
             </a:r>
@@ -5080,6 +5098,8 @@
                   <a:srgbClr val="6B7A8C"/>
                 </a:solidFill>
                 <a:latin typeface="Tahoma"/>
+                <a:ea typeface="Tahoma"/>
+                <a:cs typeface="Tahoma"/>
               </a:rPr>
               <a:t>features ที่ใช้เทรน</a:t>
             </a:r>
@@ -5168,6 +5188,8 @@
                   <a:srgbClr val="E0A458"/>
                 </a:solidFill>
                 <a:latin typeface="Tahoma"/>
+                <a:ea typeface="Tahoma"/>
+                <a:cs typeface="Tahoma"/>
               </a:rPr>
               <a:t>0.847</a:t>
             </a:r>
@@ -5210,6 +5232,8 @@
                   <a:srgbClr val="6B7A8C"/>
                 </a:solidFill>
                 <a:latin typeface="Tahoma"/>
+                <a:ea typeface="Tahoma"/>
+                <a:cs typeface="Tahoma"/>
               </a:rPr>
               <a:t>F1-score บนชุดทดสอบ</a:t>
             </a:r>
@@ -5325,6 +5349,8 @@
                   <a:srgbClr val="0F2038"/>
                 </a:solidFill>
                 <a:latin typeface="Tahoma"/>
+                <a:ea typeface="Tahoma"/>
+                <a:cs typeface="Tahoma"/>
               </a:rPr>
               <a:t>10</a:t>
             </a:r>
@@ -5367,6 +5393,8 @@
                   <a:srgbClr val="E0A458"/>
                 </a:solidFill>
                 <a:latin typeface="Tahoma"/>
+                <a:ea typeface="Tahoma"/>
+                <a:cs typeface="Tahoma"/>
               </a:rPr>
               <a:t>MODEL DEVELOPMENT</a:t>
             </a:r>
@@ -5409,6 +5437,8 @@
                   <a:srgbClr val="0F2038"/>
                 </a:solidFill>
                 <a:latin typeface="Tahoma"/>
+                <a:ea typeface="Tahoma"/>
+                <a:cs typeface="Tahoma"/>
               </a:rPr>
               <a:t>Random Forest นำตั้งแต่ก่อน Tuning (F1 = 0.842)</a:t>
             </a:r>
@@ -5519,6 +5549,8 @@
                   <a:srgbClr val="FFFFFF"/>
                 </a:solidFill>
                 <a:latin typeface="Tahoma"/>
+                <a:ea typeface="Tahoma"/>
+                <a:cs typeface="Tahoma"/>
               </a:rPr>
               <a:t>โมเดล (ค่า default)</a:t>
             </a:r>
@@ -5561,6 +5593,8 @@
                   <a:srgbClr val="FFFFFF"/>
                 </a:solidFill>
                 <a:latin typeface="Tahoma"/>
+                <a:ea typeface="Tahoma"/>
+                <a:cs typeface="Tahoma"/>
               </a:rPr>
               <a:t>F1 (CV)</a:t>
             </a:r>
@@ -5603,6 +5637,8 @@
                   <a:srgbClr val="FFFFFF"/>
                 </a:solidFill>
                 <a:latin typeface="Tahoma"/>
+                <a:ea typeface="Tahoma"/>
+                <a:cs typeface="Tahoma"/>
               </a:rPr>
               <a:t>ช่องว่าง Train–CV</a:t>
             </a:r>
@@ -5645,6 +5681,8 @@
                   <a:srgbClr val="1F2C3D"/>
                 </a:solidFill>
                 <a:latin typeface="Tahoma"/>
+                <a:ea typeface="Tahoma"/>
+                <a:cs typeface="Tahoma"/>
               </a:rPr>
               <a:t>Dummy (baseline)</a:t>
             </a:r>
@@ -5687,6 +5725,8 @@
                   <a:srgbClr val="1F2C3D"/>
                 </a:solidFill>
                 <a:latin typeface="Tahoma"/>
+                <a:ea typeface="Tahoma"/>
+                <a:cs typeface="Tahoma"/>
               </a:rPr>
               <a:t>0.000</a:t>
             </a:r>
@@ -5729,6 +5769,8 @@
                   <a:srgbClr val="1F2C3D"/>
                 </a:solidFill>
                 <a:latin typeface="Tahoma"/>
+                <a:ea typeface="Tahoma"/>
+                <a:cs typeface="Tahoma"/>
               </a:rPr>
               <a:t>0.000</a:t>
             </a:r>
@@ -5815,6 +5857,8 @@
                   <a:srgbClr val="1F2C3D"/>
                 </a:solidFill>
                 <a:latin typeface="Tahoma"/>
+                <a:ea typeface="Tahoma"/>
+                <a:cs typeface="Tahoma"/>
               </a:rPr>
               <a:t>Logistic Regression</a:t>
             </a:r>
@@ -5857,6 +5901,8 @@
                   <a:srgbClr val="1F2C3D"/>
                 </a:solidFill>
                 <a:latin typeface="Tahoma"/>
+                <a:ea typeface="Tahoma"/>
+                <a:cs typeface="Tahoma"/>
               </a:rPr>
               <a:t>0.763</a:t>
             </a:r>
@@ -5899,6 +5945,8 @@
                   <a:srgbClr val="1F2C3D"/>
                 </a:solidFill>
                 <a:latin typeface="Tahoma"/>
+                <a:ea typeface="Tahoma"/>
+                <a:cs typeface="Tahoma"/>
               </a:rPr>
               <a:t>0.001</a:t>
             </a:r>
@@ -5941,6 +5989,8 @@
                   <a:srgbClr val="1F2C3D"/>
                 </a:solidFill>
                 <a:latin typeface="Tahoma"/>
+                <a:ea typeface="Tahoma"/>
+                <a:cs typeface="Tahoma"/>
               </a:rPr>
               <a:t>Decision Tree</a:t>
             </a:r>
@@ -5983,6 +6033,8 @@
                   <a:srgbClr val="1F2C3D"/>
                 </a:solidFill>
                 <a:latin typeface="Tahoma"/>
+                <a:ea typeface="Tahoma"/>
+                <a:cs typeface="Tahoma"/>
               </a:rPr>
               <a:t>0.791</a:t>
             </a:r>
@@ -6025,6 +6077,8 @@
                   <a:srgbClr val="0F2038"/>
                 </a:solidFill>
                 <a:latin typeface="Tahoma"/>
+                <a:ea typeface="Tahoma"/>
+                <a:cs typeface="Tahoma"/>
               </a:rPr>
               <a:t>0.203</a:t>
             </a:r>
@@ -6111,6 +6165,8 @@
                   <a:srgbClr val="0F2038"/>
                 </a:solidFill>
                 <a:latin typeface="Tahoma"/>
+                <a:ea typeface="Tahoma"/>
+                <a:cs typeface="Tahoma"/>
               </a:rPr>
               <a:t>Random Forest</a:t>
             </a:r>
@@ -6153,6 +6209,8 @@
                   <a:srgbClr val="0F2038"/>
                 </a:solidFill>
                 <a:latin typeface="Tahoma"/>
+                <a:ea typeface="Tahoma"/>
+                <a:cs typeface="Tahoma"/>
               </a:rPr>
               <a:t>0.842</a:t>
             </a:r>
@@ -6195,6 +6253,8 @@
                   <a:srgbClr val="1F2C3D"/>
                 </a:solidFill>
                 <a:latin typeface="Tahoma"/>
+                <a:ea typeface="Tahoma"/>
+                <a:cs typeface="Tahoma"/>
               </a:rPr>
               <a:t>0.152</a:t>
             </a:r>
@@ -6237,6 +6297,8 @@
                   <a:srgbClr val="1F2C3D"/>
                 </a:solidFill>
                 <a:latin typeface="Tahoma"/>
+                <a:ea typeface="Tahoma"/>
+                <a:cs typeface="Tahoma"/>
               </a:rPr>
               <a:t>HistGradientBoosting</a:t>
             </a:r>
@@ -6279,6 +6341,8 @@
                   <a:srgbClr val="1F2C3D"/>
                 </a:solidFill>
                 <a:latin typeface="Tahoma"/>
+                <a:ea typeface="Tahoma"/>
+                <a:cs typeface="Tahoma"/>
               </a:rPr>
               <a:t>0.811</a:t>
             </a:r>
@@ -6321,6 +6385,8 @@
                   <a:srgbClr val="1F2C3D"/>
                 </a:solidFill>
                 <a:latin typeface="Tahoma"/>
+                <a:ea typeface="Tahoma"/>
+                <a:cs typeface="Tahoma"/>
               </a:rPr>
               <a:t>0.011</a:t>
             </a:r>
@@ -6409,6 +6475,8 @@
                   <a:srgbClr val="B33A3A"/>
                 </a:solidFill>
                 <a:latin typeface="Tahoma"/>
+                <a:ea typeface="Tahoma"/>
+                <a:cs typeface="Tahoma"/>
               </a:rPr>
               <a:t>Decision Tree overfit ชัดเจน </a:t>
             </a:r>
@@ -6418,6 +6486,8 @@
                   <a:srgbClr val="0F2038"/>
                 </a:solidFill>
                 <a:latin typeface="Tahoma"/>
+                <a:ea typeface="Tahoma"/>
+                <a:cs typeface="Tahoma"/>
               </a:rPr>
               <a:t>— ช่องว่าง train–CV ถึง 0.203</a:t>
             </a:r>
@@ -6437,6 +6507,8 @@
                   <a:srgbClr val="1F2C3D"/>
                 </a:solidFill>
                 <a:latin typeface="Tahoma"/>
+                <a:ea typeface="Tahoma"/>
+                <a:cs typeface="Tahoma"/>
               </a:rPr>
               <a:t>Random Forest แก้ปัญหานี้ด้วยการรวมหลายต้นเข้าด้วยกัน</a:t>
             </a:r>
@@ -6479,6 +6551,8 @@
                   <a:srgbClr val="6B7A8C"/>
                 </a:solidFill>
                 <a:latin typeface="Tahoma"/>
+                <a:ea typeface="Tahoma"/>
+                <a:cs typeface="Tahoma"/>
               </a:rPr>
               <a:t>ทุกโมเดลใช้ Stratified 5-Fold Cross-Validation บน train set เดียวกัน และใช้ Pipeline ชุดเดียวกัน</a:t>
             </a:r>
@@ -6594,6 +6668,8 @@
                   <a:srgbClr val="0F2038"/>
                 </a:solidFill>
                 <a:latin typeface="Tahoma"/>
+                <a:ea typeface="Tahoma"/>
+                <a:cs typeface="Tahoma"/>
               </a:rPr>
               <a:t>11</a:t>
             </a:r>
@@ -6636,6 +6712,8 @@
                   <a:srgbClr val="E0A458"/>
                 </a:solidFill>
                 <a:latin typeface="Tahoma"/>
+                <a:ea typeface="Tahoma"/>
+                <a:cs typeface="Tahoma"/>
               </a:rPr>
               <a:t>METRICS</a:t>
             </a:r>
@@ -6678,6 +6756,8 @@
                   <a:srgbClr val="0F2038"/>
                 </a:solidFill>
                 <a:latin typeface="Tahoma"/>
+                <a:ea typeface="Tahoma"/>
+                <a:cs typeface="Tahoma"/>
               </a:rPr>
               <a:t>Accuracy หลอกตา — Dummy ได้ 62.9% แต่ F1 = 0</a:t>
             </a:r>
@@ -6766,6 +6846,8 @@
                   <a:srgbClr val="B33A3A"/>
                 </a:solidFill>
                 <a:latin typeface="Tahoma"/>
+                <a:ea typeface="Tahoma"/>
+                <a:cs typeface="Tahoma"/>
               </a:rPr>
               <a:t>False Negative</a:t>
             </a:r>
@@ -6785,6 +6867,8 @@
                   <a:srgbClr val="1F2C3D"/>
                 </a:solidFill>
                 <a:latin typeface="Tahoma"/>
+                <a:ea typeface="Tahoma"/>
+                <a:cs typeface="Tahoma"/>
               </a:rPr>
               <a:t>ทำนายว่าไม่ยกเลิก → แต่ยกเลิกจริง</a:t>
             </a:r>
@@ -6804,6 +6888,8 @@
                   <a:srgbClr val="0F2038"/>
                 </a:solidFill>
                 <a:latin typeface="Tahoma"/>
+                <a:ea typeface="Tahoma"/>
+                <a:cs typeface="Tahoma"/>
               </a:rPr>
               <a:t>ห้องว่าง ขายต่อไม่ทัน = รายได้หาย</a:t>
             </a:r>
@@ -6892,6 +6978,8 @@
                   <a:srgbClr val="B33A3A"/>
                 </a:solidFill>
                 <a:latin typeface="Tahoma"/>
+                <a:ea typeface="Tahoma"/>
+                <a:cs typeface="Tahoma"/>
               </a:rPr>
               <a:t>False Positive</a:t>
             </a:r>
@@ -6911,6 +6999,8 @@
                   <a:srgbClr val="1F2C3D"/>
                 </a:solidFill>
                 <a:latin typeface="Tahoma"/>
+                <a:ea typeface="Tahoma"/>
+                <a:cs typeface="Tahoma"/>
               </a:rPr>
               <a:t>ทำนายว่ายกเลิก → แต่ลูกค้ามาจริง</a:t>
             </a:r>
@@ -6930,6 +7020,8 @@
                   <a:srgbClr val="0F2038"/>
                 </a:solidFill>
                 <a:latin typeface="Tahoma"/>
+                <a:ea typeface="Tahoma"/>
+                <a:cs typeface="Tahoma"/>
               </a:rPr>
               <a:t>ถ้าเผื่อ Overbooking ไว้ = ห้องไม่พอ เสียชื่อเสียง</a:t>
             </a:r>
@@ -6972,6 +7064,8 @@
                   <a:srgbClr val="0F2038"/>
                 </a:solidFill>
                 <a:latin typeface="Tahoma"/>
+                <a:ea typeface="Tahoma"/>
+                <a:cs typeface="Tahoma"/>
               </a:rPr>
               <a:t>ทั้งสองแบบมีต้นทุนสูงพอกัน จึงเลือก F1-score เป็นตัวชี้วัดหลัก</a:t>
             </a:r>
@@ -7060,6 +7154,8 @@
                   <a:srgbClr val="E0A458"/>
                 </a:solidFill>
                 <a:latin typeface="Tahoma"/>
+                <a:ea typeface="Tahoma"/>
+                <a:cs typeface="Tahoma"/>
               </a:rPr>
               <a:t>F1-score</a:t>
             </a:r>
@@ -7102,6 +7198,8 @@
                   <a:srgbClr val="6B7A8C"/>
                 </a:solidFill>
                 <a:latin typeface="Tahoma"/>
+                <a:ea typeface="Tahoma"/>
+                <a:cs typeface="Tahoma"/>
               </a:rPr>
               <a:t>ตัวชี้วัดหลัก — สมดุล Precision กับ Recall</a:t>
             </a:r>
@@ -7190,6 +7288,8 @@
                   <a:srgbClr val="0F2038"/>
                 </a:solidFill>
                 <a:latin typeface="Tahoma"/>
+                <a:ea typeface="Tahoma"/>
+                <a:cs typeface="Tahoma"/>
               </a:rPr>
               <a:t>ROC-AUC</a:t>
             </a:r>
@@ -7232,6 +7332,8 @@
                   <a:srgbClr val="6B7A8C"/>
                 </a:solidFill>
                 <a:latin typeface="Tahoma"/>
+                <a:ea typeface="Tahoma"/>
+                <a:cs typeface="Tahoma"/>
               </a:rPr>
               <a:t>ความสามารถแยกคลาสโดยไม่ขึ้นกับ threshold</a:t>
             </a:r>
@@ -7320,6 +7422,8 @@
                   <a:srgbClr val="0F2038"/>
                 </a:solidFill>
                 <a:latin typeface="Tahoma"/>
+                <a:ea typeface="Tahoma"/>
+                <a:cs typeface="Tahoma"/>
               </a:rPr>
               <a:t>PR-AUC</a:t>
             </a:r>
@@ -7362,6 +7466,8 @@
                   <a:srgbClr val="6B7A8C"/>
                 </a:solidFill>
                 <a:latin typeface="Tahoma"/>
+                <a:ea typeface="Tahoma"/>
+                <a:cs typeface="Tahoma"/>
               </a:rPr>
               <a:t>เหมาะกับข้อมูลไม่สมดุลมากกว่า ROC-AUC</a:t>
             </a:r>
@@ -7450,6 +7556,8 @@
                   <a:srgbClr val="0F2038"/>
                 </a:solidFill>
                 <a:latin typeface="Tahoma"/>
+                <a:ea typeface="Tahoma"/>
+                <a:cs typeface="Tahoma"/>
               </a:rPr>
               <a:t>Confusion
 Matrix</a:t>
@@ -7493,6 +7601,8 @@
                   <a:srgbClr val="6B7A8C"/>
                 </a:solidFill>
                 <a:latin typeface="Tahoma"/>
+                <a:ea typeface="Tahoma"/>
+                <a:cs typeface="Tahoma"/>
               </a:rPr>
               <a:t>เห็นจำนวน error แต่ละแบบจริง</a:t>
             </a:r>
@@ -7535,6 +7645,8 @@
                   <a:srgbClr val="6B7A8C"/>
                 </a:solidFill>
                 <a:latin typeface="Tahoma"/>
+                <a:ea typeface="Tahoma"/>
+                <a:cs typeface="Tahoma"/>
               </a:rPr>
               <a:t>Baseline: Dummy Classifier ทายคลาสที่พบบ่อยที่สุดเสมอ ได้ Accuracy 62.9% แต่ F1 = 0 คือจับคนที่จะยกเลิกไม่ได้เลยแม้แต่รายเดียว</a:t>
             </a:r>
@@ -7650,6 +7762,8 @@
                   <a:srgbClr val="0F2038"/>
                 </a:solidFill>
                 <a:latin typeface="Tahoma"/>
+                <a:ea typeface="Tahoma"/>
+                <a:cs typeface="Tahoma"/>
               </a:rPr>
               <a:t>12</a:t>
             </a:r>
@@ -7692,6 +7806,8 @@
                   <a:srgbClr val="E0A458"/>
                 </a:solidFill>
                 <a:latin typeface="Tahoma"/>
+                <a:ea typeface="Tahoma"/>
+                <a:cs typeface="Tahoma"/>
               </a:rPr>
               <a:t>HYPERPARAMETER TUNING</a:t>
             </a:r>
@@ -7734,6 +7850,8 @@
                   <a:srgbClr val="0F2038"/>
                 </a:solidFill>
                 <a:latin typeface="Tahoma"/>
+                <a:ea typeface="Tahoma"/>
+                <a:cs typeface="Tahoma"/>
               </a:rPr>
               <a:t>Tuning ช่วยลด Overfitting มากกว่าจะเพิ่มคะแนน</a:t>
             </a:r>
@@ -7820,6 +7938,8 @@
                   <a:srgbClr val="FFFFFF"/>
                 </a:solidFill>
                 <a:latin typeface="Tahoma"/>
+                <a:ea typeface="Tahoma"/>
+                <a:cs typeface="Tahoma"/>
               </a:rPr>
               <a:t>โมเดล</a:t>
             </a:r>
@@ -7862,6 +7982,8 @@
                   <a:srgbClr val="FFFFFF"/>
                 </a:solidFill>
                 <a:latin typeface="Tahoma"/>
+                <a:ea typeface="Tahoma"/>
+                <a:cs typeface="Tahoma"/>
               </a:rPr>
               <a:t>F1 ก่อน</a:t>
             </a:r>
@@ -7904,6 +8026,8 @@
                   <a:srgbClr val="FFFFFF"/>
                 </a:solidFill>
                 <a:latin typeface="Tahoma"/>
+                <a:ea typeface="Tahoma"/>
+                <a:cs typeface="Tahoma"/>
               </a:rPr>
               <a:t>F1 หลัง</a:t>
             </a:r>
@@ -7946,6 +8070,8 @@
                   <a:srgbClr val="FFFFFF"/>
                 </a:solidFill>
                 <a:latin typeface="Tahoma"/>
+                <a:ea typeface="Tahoma"/>
+                <a:cs typeface="Tahoma"/>
               </a:rPr>
               <a:t>ช่องว่าง Train–CV</a:t>
             </a:r>
@@ -7988,6 +8114,8 @@
                   <a:srgbClr val="1F2C3D"/>
                 </a:solidFill>
                 <a:latin typeface="Tahoma"/>
+                <a:ea typeface="Tahoma"/>
+                <a:cs typeface="Tahoma"/>
               </a:rPr>
               <a:t>Logistic Regression</a:t>
             </a:r>
@@ -8030,6 +8158,8 @@
                   <a:srgbClr val="1F2C3D"/>
                 </a:solidFill>
                 <a:latin typeface="Tahoma"/>
+                <a:ea typeface="Tahoma"/>
+                <a:cs typeface="Tahoma"/>
               </a:rPr>
               <a:t>0.7629</a:t>
             </a:r>
@@ -8072,6 +8202,8 @@
                   <a:srgbClr val="0F2038"/>
                 </a:solidFill>
                 <a:latin typeface="Tahoma"/>
+                <a:ea typeface="Tahoma"/>
+                <a:cs typeface="Tahoma"/>
               </a:rPr>
               <a:t>0.7784</a:t>
             </a:r>
@@ -8114,6 +8246,8 @@
                   <a:srgbClr val="1F2C3D"/>
                 </a:solidFill>
                 <a:latin typeface="Tahoma"/>
+                <a:ea typeface="Tahoma"/>
+                <a:cs typeface="Tahoma"/>
               </a:rPr>
               <a:t>0.001 → 0.002</a:t>
             </a:r>
@@ -8200,6 +8334,8 @@
                   <a:srgbClr val="0F2038"/>
                 </a:solidFill>
                 <a:latin typeface="Tahoma"/>
+                <a:ea typeface="Tahoma"/>
+                <a:cs typeface="Tahoma"/>
               </a:rPr>
               <a:t>Random Forest</a:t>
             </a:r>
@@ -8242,6 +8378,8 @@
                   <a:srgbClr val="1F2C3D"/>
                 </a:solidFill>
                 <a:latin typeface="Tahoma"/>
+                <a:ea typeface="Tahoma"/>
+                <a:cs typeface="Tahoma"/>
               </a:rPr>
               <a:t>0.8422</a:t>
             </a:r>
@@ -8284,6 +8422,8 @@
                   <a:srgbClr val="1F2C3D"/>
                 </a:solidFill>
                 <a:latin typeface="Tahoma"/>
+                <a:ea typeface="Tahoma"/>
+                <a:cs typeface="Tahoma"/>
               </a:rPr>
               <a:t>0.8419</a:t>
             </a:r>
@@ -8326,6 +8466,8 @@
                   <a:srgbClr val="0F2038"/>
                 </a:solidFill>
                 <a:latin typeface="Tahoma"/>
+                <a:ea typeface="Tahoma"/>
+                <a:cs typeface="Tahoma"/>
               </a:rPr>
               <a:t>0.152 → 0.122</a:t>
             </a:r>
@@ -8368,6 +8510,8 @@
                   <a:srgbClr val="1F2C3D"/>
                 </a:solidFill>
                 <a:latin typeface="Tahoma"/>
+                <a:ea typeface="Tahoma"/>
+                <a:cs typeface="Tahoma"/>
               </a:rPr>
               <a:t>HistGradientBoosting</a:t>
             </a:r>
@@ -8410,6 +8554,8 @@
                   <a:srgbClr val="1F2C3D"/>
                 </a:solidFill>
                 <a:latin typeface="Tahoma"/>
+                <a:ea typeface="Tahoma"/>
+                <a:cs typeface="Tahoma"/>
               </a:rPr>
               <a:t>0.8112</a:t>
             </a:r>
@@ -8452,6 +8598,8 @@
                   <a:srgbClr val="0F2038"/>
                 </a:solidFill>
                 <a:latin typeface="Tahoma"/>
+                <a:ea typeface="Tahoma"/>
+                <a:cs typeface="Tahoma"/>
               </a:rPr>
               <a:t>0.8344</a:t>
             </a:r>
@@ -8494,6 +8642,8 @@
                   <a:srgbClr val="1F2C3D"/>
                 </a:solidFill>
                 <a:latin typeface="Tahoma"/>
+                <a:ea typeface="Tahoma"/>
+                <a:cs typeface="Tahoma"/>
               </a:rPr>
               <a:t>0.011 → 0.062</a:t>
             </a:r>
@@ -8582,6 +8732,8 @@
                   <a:srgbClr val="0F2038"/>
                 </a:solidFill>
                 <a:latin typeface="Tahoma"/>
+                <a:ea typeface="Tahoma"/>
+                <a:cs typeface="Tahoma"/>
               </a:rPr>
               <a:t>F1 ของ Random Forest แทบไม่ขึ้นเลย </a:t>
             </a:r>
@@ -8591,6 +8743,8 @@
                   <a:srgbClr val="1F2C3D"/>
                 </a:solidFill>
                 <a:latin typeface="Tahoma"/>
+                <a:ea typeface="Tahoma"/>
+                <a:cs typeface="Tahoma"/>
               </a:rPr>
               <a:t>แต่ช่องว่าง train–CV แคบลงจาก 0.152 เหลือ 0.122</a:t>
             </a:r>
@@ -8610,6 +8764,8 @@
                   <a:srgbClr val="0F2038"/>
                 </a:solidFill>
                 <a:latin typeface="Tahoma"/>
+                <a:ea typeface="Tahoma"/>
+                <a:cs typeface="Tahoma"/>
               </a:rPr>
               <a:t>→ โมเดลจำข้อมูลน้อยลงและมีเสถียรภาพมากขึ้น จึงถือว่า tuning ได้ผล</a:t>
             </a:r>
@@ -8652,6 +8808,8 @@
                   <a:srgbClr val="0F2038"/>
                 </a:solidFill>
                 <a:latin typeface="Tahoma"/>
+                <a:ea typeface="Tahoma"/>
+                <a:cs typeface="Tahoma"/>
               </a:rPr>
               <a:t>ค่าที่เลือกใช้: </a:t>
             </a:r>
@@ -8671,6 +8829,8 @@
                   <a:srgbClr val="6B7A8C"/>
                 </a:solidFill>
                 <a:latin typeface="Tahoma"/>
+                <a:ea typeface="Tahoma"/>
+                <a:cs typeface="Tahoma"/>
               </a:rPr>
               <a:t>n_estimators=300 · max_depth=30 · min_samples_leaf=2 · max_features=log2 · class_weight=balanced_subsample</a:t>
             </a:r>
@@ -8737,6 +8897,8 @@
                   <a:srgbClr val="6B7A8C"/>
                 </a:solidFill>
                 <a:latin typeface="Tahoma"/>
+                <a:ea typeface="Tahoma"/>
+                <a:cs typeface="Tahoma"/>
               </a:rPr>
               <a:t>Validation Curve: เส้น train พุ่งขึ้นแต่ validation นิ่ง = สัญญาณ overfitting ใช้เลือกค่า max_depth</a:t>
             </a:r>
@@ -8852,6 +9014,8 @@
                   <a:srgbClr val="0F2038"/>
                 </a:solidFill>
                 <a:latin typeface="Tahoma"/>
+                <a:ea typeface="Tahoma"/>
+                <a:cs typeface="Tahoma"/>
               </a:rPr>
               <a:t>13</a:t>
             </a:r>
@@ -8894,6 +9058,8 @@
                   <a:srgbClr val="E0A458"/>
                 </a:solidFill>
                 <a:latin typeface="Tahoma"/>
+                <a:ea typeface="Tahoma"/>
+                <a:cs typeface="Tahoma"/>
               </a:rPr>
               <a:t>ผลบนชุดทดสอบ</a:t>
             </a:r>
@@ -8936,6 +9102,8 @@
                   <a:srgbClr val="0F2038"/>
                 </a:solidFill>
                 <a:latin typeface="Tahoma"/>
+                <a:ea typeface="Tahoma"/>
+                <a:cs typeface="Tahoma"/>
               </a:rPr>
               <a:t>ปรับ threshold เป็น 0.46 เพิ่ม Recall ได้ 2.6 จุด</a:t>
             </a:r>
@@ -9048,6 +9216,8 @@
                   <a:srgbClr val="E0A458"/>
                 </a:solidFill>
                 <a:latin typeface="Tahoma"/>
+                <a:ea typeface="Tahoma"/>
+                <a:cs typeface="Tahoma"/>
               </a:rPr>
               <a:t>0.8469</a:t>
             </a:r>
@@ -9090,6 +9260,8 @@
                   <a:srgbClr val="6B7A8C"/>
                 </a:solidFill>
                 <a:latin typeface="Tahoma"/>
+                <a:ea typeface="Tahoma"/>
+                <a:cs typeface="Tahoma"/>
               </a:rPr>
               <a:t>F1-score</a:t>
             </a:r>
@@ -9178,6 +9350,8 @@
                   <a:srgbClr val="0F2038"/>
                 </a:solidFill>
                 <a:latin typeface="Tahoma"/>
+                <a:ea typeface="Tahoma"/>
+                <a:cs typeface="Tahoma"/>
               </a:rPr>
               <a:t>0.8351</a:t>
             </a:r>
@@ -9220,6 +9394,8 @@
                   <a:srgbClr val="6B7A8C"/>
                 </a:solidFill>
                 <a:latin typeface="Tahoma"/>
+                <a:ea typeface="Tahoma"/>
+                <a:cs typeface="Tahoma"/>
               </a:rPr>
               <a:t>Precision</a:t>
             </a:r>
@@ -9308,6 +9484,8 @@
                   <a:srgbClr val="0F2038"/>
                 </a:solidFill>
                 <a:latin typeface="Tahoma"/>
+                <a:ea typeface="Tahoma"/>
+                <a:cs typeface="Tahoma"/>
               </a:rPr>
               <a:t>0.8590</a:t>
             </a:r>
@@ -9350,6 +9528,8 @@
                   <a:srgbClr val="6B7A8C"/>
                 </a:solidFill>
                 <a:latin typeface="Tahoma"/>
+                <a:ea typeface="Tahoma"/>
+                <a:cs typeface="Tahoma"/>
               </a:rPr>
               <a:t>Recall</a:t>
             </a:r>
@@ -9438,6 +9618,8 @@
                   <a:srgbClr val="0F2038"/>
                 </a:solidFill>
                 <a:latin typeface="Tahoma"/>
+                <a:ea typeface="Tahoma"/>
+                <a:cs typeface="Tahoma"/>
               </a:rPr>
               <a:t>0.9567</a:t>
             </a:r>
@@ -9480,6 +9662,8 @@
                   <a:srgbClr val="6B7A8C"/>
                 </a:solidFill>
                 <a:latin typeface="Tahoma"/>
+                <a:ea typeface="Tahoma"/>
+                <a:cs typeface="Tahoma"/>
               </a:rPr>
               <a:t>ROC-AUC</a:t>
             </a:r>
@@ -9568,6 +9752,8 @@
                   <a:srgbClr val="0F2038"/>
                 </a:solidFill>
                 <a:latin typeface="Tahoma"/>
+                <a:ea typeface="Tahoma"/>
+                <a:cs typeface="Tahoma"/>
               </a:rPr>
               <a:t>0.9367</a:t>
             </a:r>
@@ -9610,6 +9796,8 @@
                   <a:srgbClr val="6B7A8C"/>
                 </a:solidFill>
                 <a:latin typeface="Tahoma"/>
+                <a:ea typeface="Tahoma"/>
+                <a:cs typeface="Tahoma"/>
               </a:rPr>
               <a:t>PR-AUC</a:t>
             </a:r>
@@ -9698,6 +9886,8 @@
                   <a:srgbClr val="0F2038"/>
                 </a:solidFill>
                 <a:latin typeface="Tahoma"/>
+                <a:ea typeface="Tahoma"/>
+                <a:cs typeface="Tahoma"/>
               </a:rPr>
               <a:t>0.8849</a:t>
             </a:r>
@@ -9740,6 +9930,8 @@
                   <a:srgbClr val="6B7A8C"/>
                 </a:solidFill>
                 <a:latin typeface="Tahoma"/>
+                <a:ea typeface="Tahoma"/>
+                <a:cs typeface="Tahoma"/>
               </a:rPr>
               <a:t>Accuracy</a:t>
             </a:r>
@@ -9828,6 +10020,8 @@
                   <a:srgbClr val="FFFFFF"/>
                 </a:solidFill>
                 <a:latin typeface="Tahoma"/>
+                <a:ea typeface="Tahoma"/>
+                <a:cs typeface="Tahoma"/>
               </a:rPr>
               <a:t>Test set 23,842 แถว ถูกใช้เพียงครั้งเดียวตอนท้าย</a:t>
             </a:r>
@@ -9847,6 +10041,8 @@
                   <a:srgbClr val="C7D2DE"/>
                 </a:solidFill>
                 <a:latin typeface="Tahoma"/>
+                <a:ea typeface="Tahoma"/>
+                <a:cs typeface="Tahoma"/>
               </a:rPr>
               <a:t>การเลือก feature · เลือกโมเดล · tuning · หา threshold ทั้งหมดใช้ Cross-Validation บน train เท่านั้น</a:t>
             </a:r>
@@ -9962,6 +10158,8 @@
                   <a:srgbClr val="0F2038"/>
                 </a:solidFill>
                 <a:latin typeface="Tahoma"/>
+                <a:ea typeface="Tahoma"/>
+                <a:cs typeface="Tahoma"/>
               </a:rPr>
               <a:t>14</a:t>
             </a:r>
@@ -10004,6 +10202,8 @@
                   <a:srgbClr val="E0A458"/>
                 </a:solidFill>
                 <a:latin typeface="Tahoma"/>
+                <a:ea typeface="Tahoma"/>
+                <a:cs typeface="Tahoma"/>
               </a:rPr>
               <a:t>จุดค้นพบสำคัญ</a:t>
             </a:r>
@@ -10046,6 +10246,8 @@
                   <a:srgbClr val="0F2038"/>
                 </a:solidFill>
                 <a:latin typeface="Tahoma"/>
+                <a:ea typeface="Tahoma"/>
+                <a:cs typeface="Tahoma"/>
               </a:rPr>
               <a:t>ถ้าทดสอบแบบทำนายอนาคตจริง F1 ตกจาก 0.847 เหลือ 0.725</a:t>
             </a:r>
@@ -10132,6 +10334,8 @@
                   <a:srgbClr val="FFFFFF"/>
                 </a:solidFill>
                 <a:latin typeface="Tahoma"/>
+                <a:ea typeface="Tahoma"/>
+                <a:cs typeface="Tahoma"/>
               </a:rPr>
               <a:t>วิธีแบ่งข้อมูล (threshold 0.46)</a:t>
             </a:r>
@@ -10174,6 +10378,8 @@
                   <a:srgbClr val="FFFFFF"/>
                 </a:solidFill>
                 <a:latin typeface="Tahoma"/>
+                <a:ea typeface="Tahoma"/>
+                <a:cs typeface="Tahoma"/>
               </a:rPr>
               <a:t>F1</a:t>
             </a:r>
@@ -10216,6 +10422,8 @@
                   <a:srgbClr val="FFFFFF"/>
                 </a:solidFill>
                 <a:latin typeface="Tahoma"/>
+                <a:ea typeface="Tahoma"/>
+                <a:cs typeface="Tahoma"/>
               </a:rPr>
               <a:t>Precision</a:t>
             </a:r>
@@ -10258,6 +10466,8 @@
                   <a:srgbClr val="FFFFFF"/>
                 </a:solidFill>
                 <a:latin typeface="Tahoma"/>
+                <a:ea typeface="Tahoma"/>
+                <a:cs typeface="Tahoma"/>
               </a:rPr>
               <a:t>Recall</a:t>
             </a:r>
@@ -10300,6 +10510,8 @@
                   <a:srgbClr val="0F2038"/>
                 </a:solidFill>
                 <a:latin typeface="Tahoma"/>
+                <a:ea typeface="Tahoma"/>
+                <a:cs typeface="Tahoma"/>
               </a:rPr>
               <a:t>Random split</a:t>
             </a:r>
@@ -10342,6 +10554,8 @@
                   <a:srgbClr val="0F2038"/>
                 </a:solidFill>
                 <a:latin typeface="Tahoma"/>
+                <a:ea typeface="Tahoma"/>
+                <a:cs typeface="Tahoma"/>
               </a:rPr>
               <a:t>0.8469</a:t>
             </a:r>
@@ -10384,6 +10598,8 @@
                   <a:srgbClr val="1F2C3D"/>
                 </a:solidFill>
                 <a:latin typeface="Tahoma"/>
+                <a:ea typeface="Tahoma"/>
+                <a:cs typeface="Tahoma"/>
               </a:rPr>
               <a:t>0.8351</a:t>
             </a:r>
@@ -10426,6 +10642,8 @@
                   <a:srgbClr val="1F2C3D"/>
                 </a:solidFill>
                 <a:latin typeface="Tahoma"/>
+                <a:ea typeface="Tahoma"/>
+                <a:cs typeface="Tahoma"/>
               </a:rPr>
               <a:t>0.8590</a:t>
             </a:r>
@@ -10512,6 +10730,8 @@
                   <a:srgbClr val="0F2038"/>
                 </a:solidFill>
                 <a:latin typeface="Tahoma"/>
+                <a:ea typeface="Tahoma"/>
+                <a:cs typeface="Tahoma"/>
               </a:rPr>
               <a:t>Time-based split</a:t>
             </a:r>
@@ -10554,6 +10774,8 @@
                   <a:srgbClr val="0F2038"/>
                 </a:solidFill>
                 <a:latin typeface="Tahoma"/>
+                <a:ea typeface="Tahoma"/>
+                <a:cs typeface="Tahoma"/>
               </a:rPr>
               <a:t>0.7249</a:t>
             </a:r>
@@ -10596,6 +10818,8 @@
                   <a:srgbClr val="1F2C3D"/>
                 </a:solidFill>
                 <a:latin typeface="Tahoma"/>
+                <a:ea typeface="Tahoma"/>
+                <a:cs typeface="Tahoma"/>
               </a:rPr>
               <a:t>0.7996</a:t>
             </a:r>
@@ -10638,6 +10862,8 @@
                   <a:srgbClr val="1F2C3D"/>
                 </a:solidFill>
                 <a:latin typeface="Tahoma"/>
+                <a:ea typeface="Tahoma"/>
+                <a:cs typeface="Tahoma"/>
               </a:rPr>
               <a:t>0.6630</a:t>
             </a:r>
@@ -10726,6 +10952,8 @@
                   <a:srgbClr val="B33A3A"/>
                 </a:solidFill>
                 <a:latin typeface="Tahoma"/>
+                <a:ea typeface="Tahoma"/>
+                <a:cs typeface="Tahoma"/>
               </a:rPr>
               <a:t>สาเหตุ: </a:t>
             </a:r>
@@ -10735,6 +10963,8 @@
                   <a:srgbClr val="0F2038"/>
                 </a:solidFill>
                 <a:latin typeface="Tahoma"/>
+                <a:ea typeface="Tahoma"/>
+                <a:cs typeface="Tahoma"/>
               </a:rPr>
               <a:t>ชุด test ที่แบ่งตามเวลามีอัตรายกเลิก 40.99% ขณะที่ train มี 36.09%</a:t>
             </a:r>
@@ -10754,6 +10984,8 @@
                   <a:srgbClr val="1F2C3D"/>
                 </a:solidFill>
                 <a:latin typeface="Tahoma"/>
+                <a:ea typeface="Tahoma"/>
+                <a:cs typeface="Tahoma"/>
               </a:rPr>
               <a:t>พฤติกรรมลูกค้าเปลี่ยนไปตามเวลาจริง (distribution shift)</a:t>
             </a:r>
@@ -10842,6 +11074,8 @@
                   <a:srgbClr val="B33A3A"/>
                 </a:solidFill>
                 <a:latin typeface="Tahoma"/>
+                <a:ea typeface="Tahoma"/>
+                <a:cs typeface="Tahoma"/>
               </a:rPr>
               <a:t>−0.122</a:t>
             </a:r>
@@ -10884,6 +11118,8 @@
                   <a:srgbClr val="6B7A8C"/>
                 </a:solidFill>
                 <a:latin typeface="Tahoma"/>
+                <a:ea typeface="Tahoma"/>
+                <a:cs typeface="Tahoma"/>
               </a:rPr>
               <a:t>F1 ที่หายไปเมื่อทดสอบตามเวลา</a:t>
             </a:r>
@@ -10926,6 +11162,8 @@
                   <a:srgbClr val="0F2038"/>
                 </a:solidFill>
                 <a:latin typeface="Tahoma"/>
+                <a:ea typeface="Tahoma"/>
+                <a:cs typeface="Tahoma"/>
               </a:rPr>
               <a:t>“การสุ่มแบ่งข้อมูลประเมินโมเดลสูงเกินจริง เราจึงรายงานตัวเลขทั้งสองแบบ”</a:t>
             </a:r>
@@ -10945,6 +11183,8 @@
                   <a:srgbClr val="6B7A8C"/>
                 </a:solidFill>
                 <a:latin typeface="Tahoma"/>
+                <a:ea typeface="Tahoma"/>
+                <a:cs typeface="Tahoma"/>
               </a:rPr>
               <a:t>ในการใช้งานจริง โมเดลต้องทำนายอนาคตจากข้อมูลอดีต จึงควร retrain เป็นระยะ</a:t>
             </a:r>
@@ -11060,6 +11300,8 @@
                   <a:srgbClr val="0F2038"/>
                 </a:solidFill>
                 <a:latin typeface="Tahoma"/>
+                <a:ea typeface="Tahoma"/>
+                <a:cs typeface="Tahoma"/>
               </a:rPr>
               <a:t>15</a:t>
             </a:r>
@@ -11102,6 +11344,8 @@
                   <a:srgbClr val="E0A458"/>
                 </a:solidFill>
                 <a:latin typeface="Tahoma"/>
+                <a:ea typeface="Tahoma"/>
+                <a:cs typeface="Tahoma"/>
               </a:rPr>
               <a:t>DEPLOYMENT</a:t>
             </a:r>
@@ -11144,6 +11388,8 @@
                   <a:srgbClr val="0F2038"/>
                 </a:solidFill>
                 <a:latin typeface="Tahoma"/>
+                <a:ea typeface="Tahoma"/>
+                <a:cs typeface="Tahoma"/>
               </a:rPr>
               <a:t>กรอกข้อมูลการจอง → ได้ความเสี่ยงทันที</a:t>
             </a:r>
@@ -11186,6 +11432,8 @@
                   <a:srgbClr val="6B7A8C"/>
                 </a:solidFill>
                 <a:latin typeface="Tahoma"/>
+                <a:ea typeface="Tahoma"/>
+                <a:cs typeface="Tahoma"/>
               </a:rPr>
               <a:t>เว็บแอป Streamlit — ผู้ใช้กรอกรายละเอียดการจอง ระบบคำนวณ 18 features แล้วแสดงความน่าจะเป็นที่จะยกเลิก</a:t>
             </a:r>
@@ -11274,6 +11522,8 @@
                   <a:srgbClr val="B33A3A"/>
                 </a:solidFill>
                 <a:latin typeface="Tahoma"/>
+                <a:ea typeface="Tahoma"/>
+                <a:cs typeface="Tahoma"/>
               </a:rPr>
               <a:t>99.8%</a:t>
             </a:r>
@@ -11316,6 +11566,8 @@
                   <a:srgbClr val="B33A3A"/>
                 </a:solidFill>
                 <a:latin typeface="Tahoma"/>
+                <a:ea typeface="Tahoma"/>
+                <a:cs typeface="Tahoma"/>
               </a:rPr>
               <a:t>เสี่ยงสูง</a:t>
             </a:r>
@@ -11358,6 +11610,8 @@
                   <a:srgbClr val="6B7A8C"/>
                 </a:solidFill>
                 <a:latin typeface="Tahoma"/>
+                <a:ea typeface="Tahoma"/>
+                <a:cs typeface="Tahoma"/>
               </a:rPr>
               <a:t>จองล่วงหน้า 300 วัน
 Non Refund + Groups</a:t>
@@ -11447,6 +11701,8 @@
                   <a:srgbClr val="E0A458"/>
                 </a:solidFill>
                 <a:latin typeface="Tahoma"/>
+                <a:ea typeface="Tahoma"/>
+                <a:cs typeface="Tahoma"/>
               </a:rPr>
               <a:t>25.9%</a:t>
             </a:r>
@@ -11489,6 +11745,8 @@
                   <a:srgbClr val="E0A458"/>
                 </a:solidFill>
                 <a:latin typeface="Tahoma"/>
+                <a:ea typeface="Tahoma"/>
+                <a:cs typeface="Tahoma"/>
               </a:rPr>
               <a:t>เสี่ยงปานกลาง</a:t>
             </a:r>
@@ -11531,6 +11789,8 @@
                   <a:srgbClr val="6B7A8C"/>
                 </a:solidFill>
                 <a:latin typeface="Tahoma"/>
+                <a:ea typeface="Tahoma"/>
+                <a:cs typeface="Tahoma"/>
               </a:rPr>
               <a:t>จองล่วงหน้า 60 วัน
 Online TA</a:t>
@@ -11620,6 +11880,8 @@
                   <a:srgbClr val="1E7A5E"/>
                 </a:solidFill>
                 <a:latin typeface="Tahoma"/>
+                <a:ea typeface="Tahoma"/>
+                <a:cs typeface="Tahoma"/>
               </a:rPr>
               <a:t>1.0%</a:t>
             </a:r>
@@ -11662,6 +11924,8 @@
                   <a:srgbClr val="1E7A5E"/>
                 </a:solidFill>
                 <a:latin typeface="Tahoma"/>
+                <a:ea typeface="Tahoma"/>
+                <a:cs typeface="Tahoma"/>
               </a:rPr>
               <a:t>เสี่ยงต่ำ</a:t>
             </a:r>
@@ -11704,6 +11968,8 @@
                   <a:srgbClr val="6B7A8C"/>
                 </a:solidFill>
                 <a:latin typeface="Tahoma"/>
+                <a:ea typeface="Tahoma"/>
+                <a:cs typeface="Tahoma"/>
               </a:rPr>
               <a:t>จองล่วงหน้า 5 วัน
 Direct + ลูกค้าเก่า</a:t>
@@ -11793,6 +12059,8 @@
                   <a:srgbClr val="E0A458"/>
                 </a:solidFill>
                 <a:latin typeface="Tahoma"/>
+                <a:ea typeface="Tahoma"/>
+                <a:cs typeface="Tahoma"/>
               </a:rPr>
               <a:t>ข้อจำกัดของระบบ</a:t>
             </a:r>
@@ -11812,6 +12080,8 @@
                   <a:srgbClr val="C7D2DE"/>
                 </a:solidFill>
                 <a:latin typeface="Tahoma"/>
+                <a:ea typeface="Tahoma"/>
+                <a:cs typeface="Tahoma"/>
               </a:rPr>
               <a:t>โมเดลบนเว็บใช้ HistGradientBoosting ขนาด 0.8 MB (F1 0.8334) แทน Random Forest 356.8 MB เพราะข้อจำกัดด้านหน่วยความจำของบริการฟรี · ผลทำนายอิงข้อมูลโปรตุเกสปี 2015–2017</a:t>
             </a:r>
@@ -11927,6 +12197,8 @@
                   <a:srgbClr val="0F2038"/>
                 </a:solidFill>
                 <a:latin typeface="Tahoma"/>
+                <a:ea typeface="Tahoma"/>
+                <a:cs typeface="Tahoma"/>
               </a:rPr>
               <a:t>16</a:t>
             </a:r>
@@ -11969,6 +12241,8 @@
                   <a:srgbClr val="E0A458"/>
                 </a:solidFill>
                 <a:latin typeface="Tahoma"/>
+                <a:ea typeface="Tahoma"/>
+                <a:cs typeface="Tahoma"/>
               </a:rPr>
               <a:t>CONCLUSION</a:t>
             </a:r>
@@ -12011,6 +12285,8 @@
                   <a:srgbClr val="0F2038"/>
                 </a:solidFill>
                 <a:latin typeface="Tahoma"/>
+                <a:ea typeface="Tahoma"/>
+                <a:cs typeface="Tahoma"/>
               </a:rPr>
               <a:t>สรุปผล ข้อจำกัด และงานต่อไป</a:t>
             </a:r>
@@ -12099,6 +12375,8 @@
                   <a:srgbClr val="1E7A5E"/>
                 </a:solidFill>
                 <a:latin typeface="Tahoma"/>
+                <a:ea typeface="Tahoma"/>
+                <a:cs typeface="Tahoma"/>
               </a:rPr>
               <a:t>ตอบโจทย์หรือไม่</a:t>
             </a:r>
@@ -12127,7 +12405,7 @@
           </a:bodyPr>
           <a:lstStyle/>
           <a:p>
-            <a:pPr algn="l">
+            <a:pPr algn="l" marL="201168" indent="-201168">
               <a:lnSpc>
                 <a:spcPct val="125000"/>
               </a:lnSpc>
@@ -12141,6 +12419,8 @@
                   <a:srgbClr val="E0A458"/>
                 </a:solidFill>
                 <a:latin typeface="Tahoma"/>
+                <a:ea typeface="Tahoma"/>
+                <a:cs typeface="Tahoma"/>
               </a:rPr>
               <a:t>•  </a:t>
             </a:r>
@@ -12150,12 +12430,14 @@
                   <a:srgbClr val="1F2C3D"/>
                 </a:solidFill>
                 <a:latin typeface="Tahoma"/>
+                <a:ea typeface="Tahoma"/>
+                <a:cs typeface="Tahoma"/>
               </a:rPr>
               <a:t>ทำนายได้ F1 0.8469 บนชุดทดสอบ</a:t>
             </a:r>
           </a:p>
           <a:p>
-            <a:pPr algn="l">
+            <a:pPr algn="l" marL="201168" indent="-201168">
               <a:lnSpc>
                 <a:spcPct val="125000"/>
               </a:lnSpc>
@@ -12169,6 +12451,8 @@
                   <a:srgbClr val="E0A458"/>
                 </a:solidFill>
                 <a:latin typeface="Tahoma"/>
+                <a:ea typeface="Tahoma"/>
+                <a:cs typeface="Tahoma"/>
               </a:rPr>
               <a:t>•  </a:t>
             </a:r>
@@ -12178,12 +12462,14 @@
                   <a:srgbClr val="1F2C3D"/>
                 </a:solidFill>
                 <a:latin typeface="Tahoma"/>
+                <a:ea typeface="Tahoma"/>
+                <a:cs typeface="Tahoma"/>
               </a:rPr>
               <a:t>สูงกว่า baseline (F1 = 0) อย่างชัดเจน</a:t>
             </a:r>
           </a:p>
           <a:p>
-            <a:pPr algn="l">
+            <a:pPr algn="l" marL="201168" indent="-201168">
               <a:lnSpc>
                 <a:spcPct val="125000"/>
               </a:lnSpc>
@@ -12197,6 +12483,8 @@
                   <a:srgbClr val="E0A458"/>
                 </a:solidFill>
                 <a:latin typeface="Tahoma"/>
+                <a:ea typeface="Tahoma"/>
+                <a:cs typeface="Tahoma"/>
               </a:rPr>
               <a:t>•  </a:t>
             </a:r>
@@ -12206,6 +12494,8 @@
                   <a:srgbClr val="1F2C3D"/>
                 </a:solidFill>
                 <a:latin typeface="Tahoma"/>
+                <a:ea typeface="Tahoma"/>
+                <a:cs typeface="Tahoma"/>
               </a:rPr>
               <a:t>ระบุปัจจัยเสี่ยงหลักได้: มัดจำ · เอเจนต์ · ระยะจองล่วงหน้า</a:t>
             </a:r>
@@ -12294,6 +12584,8 @@
                   <a:srgbClr val="B33A3A"/>
                 </a:solidFill>
                 <a:latin typeface="Tahoma"/>
+                <a:ea typeface="Tahoma"/>
+                <a:cs typeface="Tahoma"/>
               </a:rPr>
               <a:t>ข้อจำกัด</a:t>
             </a:r>
@@ -12322,7 +12614,7 @@
           </a:bodyPr>
           <a:lstStyle/>
           <a:p>
-            <a:pPr algn="l">
+            <a:pPr algn="l" marL="201168" indent="-201168">
               <a:lnSpc>
                 <a:spcPct val="125000"/>
               </a:lnSpc>
@@ -12336,6 +12628,8 @@
                   <a:srgbClr val="E0A458"/>
                 </a:solidFill>
                 <a:latin typeface="Tahoma"/>
+                <a:ea typeface="Tahoma"/>
+                <a:cs typeface="Tahoma"/>
               </a:rPr>
               <a:t>•  </a:t>
             </a:r>
@@ -12345,12 +12639,14 @@
                   <a:srgbClr val="1F2C3D"/>
                 </a:solidFill>
                 <a:latin typeface="Tahoma"/>
+                <a:ea typeface="Tahoma"/>
+                <a:cs typeface="Tahoma"/>
               </a:rPr>
               <a:t>ข้อมูลจากโปรตุเกส ปี 2015–2017 เท่านั้น</a:t>
             </a:r>
           </a:p>
           <a:p>
-            <a:pPr algn="l">
+            <a:pPr algn="l" marL="201168" indent="-201168">
               <a:lnSpc>
                 <a:spcPct val="125000"/>
               </a:lnSpc>
@@ -12364,6 +12660,8 @@
                   <a:srgbClr val="E0A458"/>
                 </a:solidFill>
                 <a:latin typeface="Tahoma"/>
+                <a:ea typeface="Tahoma"/>
+                <a:cs typeface="Tahoma"/>
               </a:rPr>
               <a:t>•  </a:t>
             </a:r>
@@ -12373,12 +12671,14 @@
                   <a:srgbClr val="1F2C3D"/>
                 </a:solidFill>
                 <a:latin typeface="Tahoma"/>
+                <a:ea typeface="Tahoma"/>
+                <a:cs typeface="Tahoma"/>
               </a:rPr>
               <a:t>ทดสอบตามเวลาได้ F1 ~0.72 ต่ำกว่าผลสุ่มแบ่ง</a:t>
             </a:r>
           </a:p>
           <a:p>
-            <a:pPr algn="l">
+            <a:pPr algn="l" marL="201168" indent="-201168">
               <a:lnSpc>
                 <a:spcPct val="125000"/>
               </a:lnSpc>
@@ -12392,6 +12692,8 @@
                   <a:srgbClr val="E0A458"/>
                 </a:solidFill>
                 <a:latin typeface="Tahoma"/>
+                <a:ea typeface="Tahoma"/>
+                <a:cs typeface="Tahoma"/>
               </a:rPr>
               <a:t>•  </a:t>
             </a:r>
@@ -12401,6 +12703,8 @@
                   <a:srgbClr val="1F2C3D"/>
                 </a:solidFill>
                 <a:latin typeface="Tahoma"/>
+                <a:ea typeface="Tahoma"/>
+                <a:cs typeface="Tahoma"/>
               </a:rPr>
               <a:t>มีแถวซ้ำ 31,994 แถวที่เลือกไม่ลบ</a:t>
             </a:r>
@@ -12489,6 +12793,8 @@
                   <a:srgbClr val="0F2038"/>
                 </a:solidFill>
                 <a:latin typeface="Tahoma"/>
+                <a:ea typeface="Tahoma"/>
+                <a:cs typeface="Tahoma"/>
               </a:rPr>
               <a:t>งานต่อไป</a:t>
             </a:r>
@@ -12517,7 +12823,7 @@
           </a:bodyPr>
           <a:lstStyle/>
           <a:p>
-            <a:pPr algn="l">
+            <a:pPr algn="l" marL="201168" indent="-201168">
               <a:lnSpc>
                 <a:spcPct val="125000"/>
               </a:lnSpc>
@@ -12531,6 +12837,8 @@
                   <a:srgbClr val="E0A458"/>
                 </a:solidFill>
                 <a:latin typeface="Tahoma"/>
+                <a:ea typeface="Tahoma"/>
+                <a:cs typeface="Tahoma"/>
               </a:rPr>
               <a:t>•  </a:t>
             </a:r>
@@ -12540,12 +12848,14 @@
                   <a:srgbClr val="1F2C3D"/>
                 </a:solidFill>
                 <a:latin typeface="Tahoma"/>
+                <a:ea typeface="Tahoma"/>
+                <a:cs typeface="Tahoma"/>
               </a:rPr>
               <a:t>ใช้ time-based validation ตอน tuning</a:t>
             </a:r>
           </a:p>
           <a:p>
-            <a:pPr algn="l">
+            <a:pPr algn="l" marL="201168" indent="-201168">
               <a:lnSpc>
                 <a:spcPct val="125000"/>
               </a:lnSpc>
@@ -12559,6 +12869,8 @@
                   <a:srgbClr val="E0A458"/>
                 </a:solidFill>
                 <a:latin typeface="Tahoma"/>
+                <a:ea typeface="Tahoma"/>
+                <a:cs typeface="Tahoma"/>
               </a:rPr>
               <a:t>•  </a:t>
             </a:r>
@@ -12568,12 +12880,14 @@
                   <a:srgbClr val="1F2C3D"/>
                 </a:solidFill>
                 <a:latin typeface="Tahoma"/>
+                <a:ea typeface="Tahoma"/>
+                <a:cs typeface="Tahoma"/>
               </a:rPr>
               <a:t>ตั้ง threshold ตามต้นทุนธุรกิจจริง</a:t>
             </a:r>
           </a:p>
           <a:p>
-            <a:pPr algn="l">
+            <a:pPr algn="l" marL="201168" indent="-201168">
               <a:lnSpc>
                 <a:spcPct val="125000"/>
               </a:lnSpc>
@@ -12587,6 +12901,8 @@
                   <a:srgbClr val="E0A458"/>
                 </a:solidFill>
                 <a:latin typeface="Tahoma"/>
+                <a:ea typeface="Tahoma"/>
+                <a:cs typeface="Tahoma"/>
               </a:rPr>
               <a:t>•  </a:t>
             </a:r>
@@ -12596,6 +12912,8 @@
                   <a:srgbClr val="1F2C3D"/>
                 </a:solidFill>
                 <a:latin typeface="Tahoma"/>
+                <a:ea typeface="Tahoma"/>
+                <a:cs typeface="Tahoma"/>
               </a:rPr>
               <a:t>เพิ่ม SHAP อธิบายผลเป็นรายรายการ</a:t>
             </a:r>
@@ -12684,6 +13002,8 @@
                   <a:srgbClr val="E0A458"/>
                 </a:solidFill>
                 <a:latin typeface="Tahoma"/>
+                <a:ea typeface="Tahoma"/>
+                <a:cs typeface="Tahoma"/>
               </a:rPr>
               <a:t>สิ่งที่ได้เรียนรู้</a:t>
             </a:r>
@@ -12703,6 +13023,8 @@
                   <a:srgbClr val="C7D2DE"/>
                 </a:solidFill>
                 <a:latin typeface="Tahoma"/>
+                <a:ea typeface="Tahoma"/>
+                <a:cs typeface="Tahoma"/>
               </a:rPr>
               <a:t>ระวัง Data Leakage ตั้งแต่ก่อนแบ่งข้อมูล · เลือก metric ให้ตรงกับต้นทุนของปัญหา · ใช้ Pipeline ป้องกันข้อมูลรั่วระหว่าง Cross-Validation · ตัวเลขที่ดูดีเกินจริงมักมาจากวิธีประเมินที่ไม่ตรงกับการใช้งานจริง</a:t>
             </a:r>
@@ -12807,6 +13129,8 @@
                   <a:srgbClr val="FFFFFF"/>
                 </a:solidFill>
                 <a:latin typeface="Tahoma"/>
+                <a:ea typeface="Tahoma"/>
+                <a:cs typeface="Tahoma"/>
               </a:rPr>
               <a:t>ขอบคุณครับ / ค่ะ</a:t>
             </a:r>
@@ -12849,6 +13173,8 @@
                   <a:srgbClr val="E0A458"/>
                 </a:solidFill>
                 <a:latin typeface="Tahoma"/>
+                <a:ea typeface="Tahoma"/>
+                <a:cs typeface="Tahoma"/>
               </a:rPr>
               <a:t>Q &amp; A</a:t>
             </a:r>
@@ -12891,6 +13217,8 @@
                   <a:srgbClr val="FFFFFF"/>
                 </a:solidFill>
                 <a:latin typeface="Tahoma"/>
+                <a:ea typeface="Tahoma"/>
+                <a:cs typeface="Tahoma"/>
               </a:rPr>
               <a:t>โค้ดทั้งหมด (Colab / GitHub)</a:t>
             </a:r>
@@ -12910,6 +13238,8 @@
                   <a:srgbClr val="C7D2DE"/>
                 </a:solidFill>
                 <a:latin typeface="Tahoma"/>
+                <a:ea typeface="Tahoma"/>
+                <a:cs typeface="Tahoma"/>
               </a:rPr>
               <a:t>github.com/Hake2549/ML</a:t>
             </a:r>
@@ -12998,6 +13328,8 @@
                   <a:srgbClr val="E0A458"/>
                 </a:solidFill>
                 <a:latin typeface="Tahoma"/>
+                <a:ea typeface="Tahoma"/>
+                <a:cs typeface="Tahoma"/>
               </a:rPr>
               <a:t>สไลด์สำรอง (เปิดเมื่อถูกถาม)</a:t>
             </a:r>
@@ -13026,7 +13358,7 @@
           </a:bodyPr>
           <a:lstStyle/>
           <a:p>
-            <a:pPr algn="l">
+            <a:pPr algn="l" marL="201168" indent="-201168">
               <a:lnSpc>
                 <a:spcPct val="125000"/>
               </a:lnSpc>
@@ -13040,6 +13372,8 @@
                   <a:srgbClr val="E0A458"/>
                 </a:solidFill>
                 <a:latin typeface="Tahoma"/>
+                <a:ea typeface="Tahoma"/>
+                <a:cs typeface="Tahoma"/>
               </a:rPr>
               <a:t>•  </a:t>
             </a:r>
@@ -13049,6 +13383,8 @@
                   <a:srgbClr val="FFFFFF"/>
                 </a:solidFill>
                 <a:latin typeface="Tahoma"/>
+                <a:ea typeface="Tahoma"/>
+                <a:cs typeface="Tahoma"/>
               </a:rPr>
               <a:t>RF Importance ก่อน–หลัง tune</a:t>
             </a:r>
@@ -13058,12 +13394,14 @@
                   <a:srgbClr val="C7D2DE"/>
                 </a:solidFill>
                 <a:latin typeface="Tahoma"/>
+                <a:ea typeface="Tahoma"/>
+                <a:cs typeface="Tahoma"/>
               </a:rPr>
               <a:t> (Spearman 0.985)</a:t>
             </a:r>
           </a:p>
           <a:p>
-            <a:pPr algn="l">
+            <a:pPr algn="l" marL="201168" indent="-201168">
               <a:lnSpc>
                 <a:spcPct val="125000"/>
               </a:lnSpc>
@@ -13077,6 +13415,8 @@
                   <a:srgbClr val="E0A458"/>
                 </a:solidFill>
                 <a:latin typeface="Tahoma"/>
+                <a:ea typeface="Tahoma"/>
+                <a:cs typeface="Tahoma"/>
               </a:rPr>
               <a:t>•  </a:t>
             </a:r>
@@ -13086,12 +13426,14 @@
                   <a:srgbClr val="FFFFFF"/>
                 </a:solidFill>
                 <a:latin typeface="Tahoma"/>
+                <a:ea typeface="Tahoma"/>
+                <a:cs typeface="Tahoma"/>
               </a:rPr>
               <a:t>Learning Curve</a:t>
             </a:r>
           </a:p>
           <a:p>
-            <a:pPr algn="l">
+            <a:pPr algn="l" marL="201168" indent="-201168">
               <a:lnSpc>
                 <a:spcPct val="125000"/>
               </a:lnSpc>
@@ -13105,6 +13447,8 @@
                   <a:srgbClr val="E0A458"/>
                 </a:solidFill>
                 <a:latin typeface="Tahoma"/>
+                <a:ea typeface="Tahoma"/>
+                <a:cs typeface="Tahoma"/>
               </a:rPr>
               <a:t>•  </a:t>
             </a:r>
@@ -13114,12 +13458,14 @@
                   <a:srgbClr val="FFFFFF"/>
                 </a:solidFill>
                 <a:latin typeface="Tahoma"/>
+                <a:ea typeface="Tahoma"/>
+                <a:cs typeface="Tahoma"/>
               </a:rPr>
               <a:t>Error Analysis แยกตามกลุ่ม</a:t>
             </a:r>
           </a:p>
           <a:p>
-            <a:pPr algn="l">
+            <a:pPr algn="l" marL="201168" indent="-201168">
               <a:lnSpc>
                 <a:spcPct val="125000"/>
               </a:lnSpc>
@@ -13133,6 +13479,8 @@
                   <a:srgbClr val="E0A458"/>
                 </a:solidFill>
                 <a:latin typeface="Tahoma"/>
+                <a:ea typeface="Tahoma"/>
+                <a:cs typeface="Tahoma"/>
               </a:rPr>
               <a:t>•  </a:t>
             </a:r>
@@ -13142,12 +13490,14 @@
                   <a:srgbClr val="FFFFFF"/>
                 </a:solidFill>
                 <a:latin typeface="Tahoma"/>
+                <a:ea typeface="Tahoma"/>
+                <a:cs typeface="Tahoma"/>
               </a:rPr>
               <a:t>ช่วงค่า Hyperparameter ที่ค้นหา</a:t>
             </a:r>
           </a:p>
           <a:p>
-            <a:pPr algn="l">
+            <a:pPr algn="l" marL="201168" indent="-201168">
               <a:lnSpc>
                 <a:spcPct val="125000"/>
               </a:lnSpc>
@@ -13161,6 +13511,8 @@
                   <a:srgbClr val="E0A458"/>
                 </a:solidFill>
                 <a:latin typeface="Tahoma"/>
+                <a:ea typeface="Tahoma"/>
+                <a:cs typeface="Tahoma"/>
               </a:rPr>
               <a:t>•  </a:t>
             </a:r>
@@ -13170,6 +13522,8 @@
                   <a:srgbClr val="FFFFFF"/>
                 </a:solidFill>
                 <a:latin typeface="Tahoma"/>
+                <a:ea typeface="Tahoma"/>
+                <a:cs typeface="Tahoma"/>
               </a:rPr>
               <a:t>Correlation Heatmap</a:t>
             </a:r>
@@ -13285,6 +13639,8 @@
                   <a:srgbClr val="0F2038"/>
                 </a:solidFill>
                 <a:latin typeface="Tahoma"/>
+                <a:ea typeface="Tahoma"/>
+                <a:cs typeface="Tahoma"/>
               </a:rPr>
               <a:t>2</a:t>
             </a:r>
@@ -13327,6 +13683,8 @@
                   <a:srgbClr val="E0A458"/>
                 </a:solidFill>
                 <a:latin typeface="Tahoma"/>
+                <a:ea typeface="Tahoma"/>
+                <a:cs typeface="Tahoma"/>
               </a:rPr>
               <a:t>PROBLEM</a:t>
             </a:r>
@@ -13369,6 +13727,8 @@
                   <a:srgbClr val="0F2038"/>
                 </a:solidFill>
                 <a:latin typeface="Tahoma"/>
+                <a:ea typeface="Tahoma"/>
+                <a:cs typeface="Tahoma"/>
               </a:rPr>
               <a:t>ยกเลิก 37% คือรายได้ที่หายและพยากรณ์ห้องที่ผิดพลาด</a:t>
             </a:r>
@@ -13397,7 +13757,7 @@
           </a:bodyPr>
           <a:lstStyle/>
           <a:p>
-            <a:pPr algn="l">
+            <a:pPr algn="l" marL="201168" indent="-201168">
               <a:lnSpc>
                 <a:spcPct val="125000"/>
               </a:lnSpc>
@@ -13411,6 +13771,8 @@
                   <a:srgbClr val="E0A458"/>
                 </a:solidFill>
                 <a:latin typeface="Tahoma"/>
+                <a:ea typeface="Tahoma"/>
+                <a:cs typeface="Tahoma"/>
               </a:rPr>
               <a:t>•  </a:t>
             </a:r>
@@ -13420,12 +13782,14 @@
                   <a:srgbClr val="1F2C3D"/>
                 </a:solidFill>
                 <a:latin typeface="Tahoma"/>
+                <a:ea typeface="Tahoma"/>
+                <a:cs typeface="Tahoma"/>
               </a:rPr>
               <a:t>ยกเลิกกระชั้นชิด → ขายห้องต่อไม่ทัน → รายได้หายทันที</a:t>
             </a:r>
           </a:p>
           <a:p>
-            <a:pPr algn="l">
+            <a:pPr algn="l" marL="201168" indent="-201168">
               <a:lnSpc>
                 <a:spcPct val="125000"/>
               </a:lnSpc>
@@ -13439,6 +13803,8 @@
                   <a:srgbClr val="E0A458"/>
                 </a:solidFill>
                 <a:latin typeface="Tahoma"/>
+                <a:ea typeface="Tahoma"/>
+                <a:cs typeface="Tahoma"/>
               </a:rPr>
               <a:t>•  </a:t>
             </a:r>
@@ -13448,12 +13814,14 @@
                   <a:srgbClr val="1F2C3D"/>
                 </a:solidFill>
                 <a:latin typeface="Tahoma"/>
+                <a:ea typeface="Tahoma"/>
+                <a:cs typeface="Tahoma"/>
               </a:rPr>
               <a:t>โรงแรมต้องทำ Overbooking ชดเชย ซึ่งถ้าประเมินผิดจะเสียทั้งเงินและชื่อเสียง</a:t>
             </a:r>
           </a:p>
           <a:p>
-            <a:pPr algn="l">
+            <a:pPr algn="l" marL="201168" indent="-201168">
               <a:lnSpc>
                 <a:spcPct val="125000"/>
               </a:lnSpc>
@@ -13467,6 +13835,8 @@
                   <a:srgbClr val="E0A458"/>
                 </a:solidFill>
                 <a:latin typeface="Tahoma"/>
+                <a:ea typeface="Tahoma"/>
+                <a:cs typeface="Tahoma"/>
               </a:rPr>
               <a:t>•  </a:t>
             </a:r>
@@ -13476,6 +13846,8 @@
                   <a:srgbClr val="0F2038"/>
                 </a:solidFill>
                 <a:latin typeface="Tahoma"/>
+                <a:ea typeface="Tahoma"/>
+                <a:cs typeface="Tahoma"/>
               </a:rPr>
               <a:t>Input = </a:t>
             </a:r>
@@ -13485,6 +13857,8 @@
                   <a:srgbClr val="1F2C3D"/>
                 </a:solidFill>
                 <a:latin typeface="Tahoma"/>
+                <a:ea typeface="Tahoma"/>
+                <a:cs typeface="Tahoma"/>
               </a:rPr>
               <a:t>ข้อมูลการจอง ณ วันที่จอง  →  </a:t>
             </a:r>
@@ -13494,6 +13868,8 @@
                   <a:srgbClr val="0F2038"/>
                 </a:solidFill>
                 <a:latin typeface="Tahoma"/>
+                <a:ea typeface="Tahoma"/>
+                <a:cs typeface="Tahoma"/>
               </a:rPr>
               <a:t>Output = </a:t>
             </a:r>
@@ -13503,12 +13879,14 @@
                   <a:srgbClr val="1F2C3D"/>
                 </a:solidFill>
                 <a:latin typeface="Tahoma"/>
+                <a:ea typeface="Tahoma"/>
+                <a:cs typeface="Tahoma"/>
               </a:rPr>
               <a:t>ยกเลิก (1) / ไม่ยกเลิก (0)</a:t>
             </a:r>
           </a:p>
           <a:p>
-            <a:pPr algn="l">
+            <a:pPr algn="l" marL="201168" indent="-201168">
               <a:lnSpc>
                 <a:spcPct val="125000"/>
               </a:lnSpc>
@@ -13522,6 +13900,8 @@
                   <a:srgbClr val="E0A458"/>
                 </a:solidFill>
                 <a:latin typeface="Tahoma"/>
+                <a:ea typeface="Tahoma"/>
+                <a:cs typeface="Tahoma"/>
               </a:rPr>
               <a:t>•  </a:t>
             </a:r>
@@ -13531,6 +13911,8 @@
                   <a:srgbClr val="1F2C3D"/>
                 </a:solidFill>
                 <a:latin typeface="Tahoma"/>
+                <a:ea typeface="Tahoma"/>
+                <a:cs typeface="Tahoma"/>
               </a:rPr>
               <a:t>ขอบเขต: โรงแรม 2 แห่งในโปรตุเกส ก.ค. 2015 – ส.ค. 2017</a:t>
             </a:r>
@@ -13619,6 +14001,8 @@
                   <a:srgbClr val="E0A458"/>
                 </a:solidFill>
                 <a:latin typeface="Tahoma"/>
+                <a:ea typeface="Tahoma"/>
+                <a:cs typeface="Tahoma"/>
               </a:rPr>
               <a:t>37%</a:t>
             </a:r>
@@ -13661,6 +14045,8 @@
                   <a:srgbClr val="FFFFFF"/>
                 </a:solidFill>
                 <a:latin typeface="Tahoma"/>
+                <a:ea typeface="Tahoma"/>
+                <a:cs typeface="Tahoma"/>
               </a:rPr>
               <a:t>ของการจองทั้งหมดถูกยกเลิก
 (44,224 จาก 119,390 รายการ)</a:t>
@@ -13704,6 +14090,8 @@
                   <a:srgbClr val="6B7A8C"/>
                 </a:solidFill>
                 <a:latin typeface="Tahoma"/>
+                <a:ea typeface="Tahoma"/>
+                <a:cs typeface="Tahoma"/>
               </a:rPr>
               <a:t>ปัญหานี้เป็น Binary Classification ที่มีมูลค่าทางธุรกิจวัดได้จริง</a:t>
             </a:r>
@@ -13819,6 +14207,8 @@
                   <a:srgbClr val="0F2038"/>
                 </a:solidFill>
                 <a:latin typeface="Tahoma"/>
+                <a:ea typeface="Tahoma"/>
+                <a:cs typeface="Tahoma"/>
               </a:rPr>
               <a:t>3</a:t>
             </a:r>
@@ -13861,6 +14251,8 @@
                   <a:srgbClr val="E0A458"/>
                 </a:solidFill>
                 <a:latin typeface="Tahoma"/>
+                <a:ea typeface="Tahoma"/>
+                <a:cs typeface="Tahoma"/>
               </a:rPr>
               <a:t>DATA UNDERSTANDING</a:t>
             </a:r>
@@ -13903,6 +14295,8 @@
                   <a:srgbClr val="0F2038"/>
                 </a:solidFill>
                 <a:latin typeface="Tahoma"/>
+                <a:ea typeface="Tahoma"/>
+                <a:cs typeface="Tahoma"/>
               </a:rPr>
               <a:t>ทายว่า "ไม่ยกเลิก" ทุกรายการ ก็ได้ Accuracy 62.9% แล้ว</a:t>
             </a:r>
@@ -13955,7 +14349,7 @@
           </a:bodyPr>
           <a:lstStyle/>
           <a:p>
-            <a:pPr algn="l">
+            <a:pPr algn="l" marL="201168" indent="-201168">
               <a:lnSpc>
                 <a:spcPct val="125000"/>
               </a:lnSpc>
@@ -13969,6 +14363,8 @@
                   <a:srgbClr val="E0A458"/>
                 </a:solidFill>
                 <a:latin typeface="Tahoma"/>
+                <a:ea typeface="Tahoma"/>
+                <a:cs typeface="Tahoma"/>
               </a:rPr>
               <a:t>•  </a:t>
             </a:r>
@@ -13978,12 +14374,14 @@
                   <a:srgbClr val="1F2C3D"/>
                 </a:solidFill>
                 <a:latin typeface="Tahoma"/>
+                <a:ea typeface="Tahoma"/>
+                <a:cs typeface="Tahoma"/>
               </a:rPr>
               <a:t>ข้อมูลดิบ 119,390 แถว × 32 คอลัมน์</a:t>
             </a:r>
           </a:p>
           <a:p>
-            <a:pPr algn="l">
+            <a:pPr algn="l" marL="201168" indent="-201168">
               <a:lnSpc>
                 <a:spcPct val="125000"/>
               </a:lnSpc>
@@ -13997,6 +14395,8 @@
                   <a:srgbClr val="E0A458"/>
                 </a:solidFill>
                 <a:latin typeface="Tahoma"/>
+                <a:ea typeface="Tahoma"/>
+                <a:cs typeface="Tahoma"/>
               </a:rPr>
               <a:t>•  </a:t>
             </a:r>
@@ -14006,12 +14406,14 @@
                   <a:srgbClr val="1F2C3D"/>
                 </a:solidFill>
                 <a:latin typeface="Tahoma"/>
+                <a:ea typeface="Tahoma"/>
+                <a:cs typeface="Tahoma"/>
               </a:rPr>
               <a:t>ยกเลิก 44,224 รายการ : ไม่ยกเลิก 75,166 รายการ</a:t>
             </a:r>
           </a:p>
           <a:p>
-            <a:pPr algn="l">
+            <a:pPr algn="l" marL="201168" indent="-201168">
               <a:lnSpc>
                 <a:spcPct val="125000"/>
               </a:lnSpc>
@@ -14025,6 +14427,8 @@
                   <a:srgbClr val="E0A458"/>
                 </a:solidFill>
                 <a:latin typeface="Tahoma"/>
+                <a:ea typeface="Tahoma"/>
+                <a:cs typeface="Tahoma"/>
               </a:rPr>
               <a:t>•  </a:t>
             </a:r>
@@ -14034,6 +14438,8 @@
                   <a:srgbClr val="1F2C3D"/>
                 </a:solidFill>
                 <a:latin typeface="Tahoma"/>
+                <a:ea typeface="Tahoma"/>
+                <a:cs typeface="Tahoma"/>
               </a:rPr>
               <a:t>สัดส่วนคลาสไม่สมดุล 37 : 63</a:t>
             </a:r>
@@ -14122,6 +14528,8 @@
                   <a:srgbClr val="E0A458"/>
                 </a:solidFill>
                 <a:latin typeface="Tahoma"/>
+                <a:ea typeface="Tahoma"/>
+                <a:cs typeface="Tahoma"/>
               </a:rPr>
               <a:t>ประโยคสำคัญ: </a:t>
             </a:r>
@@ -14141,6 +14549,8 @@
                   <a:srgbClr val="0F2038"/>
                 </a:solidFill>
                 <a:latin typeface="Tahoma"/>
+                <a:ea typeface="Tahoma"/>
+                <a:cs typeface="Tahoma"/>
               </a:rPr>
               <a:t>“นี่คือเหตุผลที่เราไม่ใช้ Accuracy เป็นตัวชี้วัดหลัก </a:t>
             </a:r>
@@ -14150,6 +14560,8 @@
                   <a:srgbClr val="0F2038"/>
                 </a:solidFill>
                 <a:latin typeface="Tahoma"/>
+                <a:ea typeface="Tahoma"/>
+                <a:cs typeface="Tahoma"/>
               </a:rPr>
               <a:t>เพราะโมเดลที่ไม่ได้เรียนรู้อะไรเลยก็ทำคะแนนนี้ได้”</a:t>
             </a:r>
@@ -14265,6 +14677,8 @@
                   <a:srgbClr val="0F2038"/>
                 </a:solidFill>
                 <a:latin typeface="Tahoma"/>
+                <a:ea typeface="Tahoma"/>
+                <a:cs typeface="Tahoma"/>
               </a:rPr>
               <a:t>4</a:t>
             </a:r>
@@ -14307,6 +14721,8 @@
                   <a:srgbClr val="E0A458"/>
                 </a:solidFill>
                 <a:latin typeface="Tahoma"/>
+                <a:ea typeface="Tahoma"/>
+                <a:cs typeface="Tahoma"/>
               </a:rPr>
               <a:t>EDA</a:t>
             </a:r>
@@ -14349,6 +14765,8 @@
                   <a:srgbClr val="0F2038"/>
                 </a:solidFill>
                 <a:latin typeface="Tahoma"/>
+                <a:ea typeface="Tahoma"/>
+                <a:cs typeface="Tahoma"/>
               </a:rPr>
               <a:t>ประเภทมัดจำและช่องทางการจองต่างกันอย่างชัดเจน</a:t>
             </a:r>
@@ -14401,7 +14819,7 @@
           </a:bodyPr>
           <a:lstStyle/>
           <a:p>
-            <a:pPr algn="l">
+            <a:pPr algn="l" marL="201168" indent="-201168">
               <a:lnSpc>
                 <a:spcPct val="125000"/>
               </a:lnSpc>
@@ -14415,6 +14833,8 @@
                   <a:srgbClr val="E0A458"/>
                 </a:solidFill>
                 <a:latin typeface="Tahoma"/>
+                <a:ea typeface="Tahoma"/>
+                <a:cs typeface="Tahoma"/>
               </a:rPr>
               <a:t>•  </a:t>
             </a:r>
@@ -14424,6 +14844,8 @@
                   <a:srgbClr val="0F2038"/>
                 </a:solidFill>
                 <a:latin typeface="Tahoma"/>
+                <a:ea typeface="Tahoma"/>
+                <a:cs typeface="Tahoma"/>
               </a:rPr>
               <a:t>Non Refund </a:t>
             </a:r>
@@ -14433,12 +14855,14 @@
                   <a:srgbClr val="1F2C3D"/>
                 </a:solidFill>
                 <a:latin typeface="Tahoma"/>
+                <a:ea typeface="Tahoma"/>
+                <a:cs typeface="Tahoma"/>
               </a:rPr>
               <a:t>ยกเลิกเกือบ 100% ทั้งที่จ่ายเงินไปแล้ว</a:t>
             </a:r>
           </a:p>
           <a:p>
-            <a:pPr algn="l">
+            <a:pPr algn="l" marL="201168" indent="-201168">
               <a:lnSpc>
                 <a:spcPct val="125000"/>
               </a:lnSpc>
@@ -14452,6 +14876,8 @@
                   <a:srgbClr val="E0A458"/>
                 </a:solidFill>
                 <a:latin typeface="Tahoma"/>
+                <a:ea typeface="Tahoma"/>
+                <a:cs typeface="Tahoma"/>
               </a:rPr>
               <a:t>•  </a:t>
             </a:r>
@@ -14461,6 +14887,8 @@
                   <a:srgbClr val="0F2038"/>
                 </a:solidFill>
                 <a:latin typeface="Tahoma"/>
+                <a:ea typeface="Tahoma"/>
+                <a:cs typeface="Tahoma"/>
               </a:rPr>
               <a:t>Groups </a:t>
             </a:r>
@@ -14470,12 +14898,14 @@
                   <a:srgbClr val="1F2C3D"/>
                 </a:solidFill>
                 <a:latin typeface="Tahoma"/>
+                <a:ea typeface="Tahoma"/>
+                <a:cs typeface="Tahoma"/>
               </a:rPr>
               <a:t>ยกเลิกสูงกว่าการจองแบบอื่นชัดเจน</a:t>
             </a:r>
           </a:p>
           <a:p>
-            <a:pPr algn="l">
+            <a:pPr algn="l" marL="201168" indent="-201168">
               <a:lnSpc>
                 <a:spcPct val="125000"/>
               </a:lnSpc>
@@ -14489,6 +14919,8 @@
                   <a:srgbClr val="E0A458"/>
                 </a:solidFill>
                 <a:latin typeface="Tahoma"/>
+                <a:ea typeface="Tahoma"/>
+                <a:cs typeface="Tahoma"/>
               </a:rPr>
               <a:t>•  </a:t>
             </a:r>
@@ -14498,6 +14930,8 @@
                   <a:srgbClr val="1F2C3D"/>
                 </a:solidFill>
                 <a:latin typeface="Tahoma"/>
+                <a:ea typeface="Tahoma"/>
+                <a:cs typeface="Tahoma"/>
               </a:rPr>
               <a:t>เส้นประแดง = อัตรายกเลิกเฉลี่ยทั้งชุดข้อมูล</a:t>
             </a:r>
@@ -14540,6 +14974,8 @@
                   <a:srgbClr val="6B7A8C"/>
                 </a:solidFill>
                 <a:latin typeface="Tahoma"/>
+                <a:ea typeface="Tahoma"/>
+                <a:cs typeface="Tahoma"/>
               </a:rPr>
               <a:t>ทุกกราฟคำนวณจากข้อมูลจริงทั้ง 119,390 แถว</a:t>
             </a:r>
@@ -14655,6 +15091,8 @@
                   <a:srgbClr val="0F2038"/>
                 </a:solidFill>
                 <a:latin typeface="Tahoma"/>
+                <a:ea typeface="Tahoma"/>
+                <a:cs typeface="Tahoma"/>
               </a:rPr>
               <a:t>5</a:t>
             </a:r>
@@ -14697,6 +15135,8 @@
                   <a:srgbClr val="E0A458"/>
                 </a:solidFill>
                 <a:latin typeface="Tahoma"/>
+                <a:ea typeface="Tahoma"/>
+                <a:cs typeface="Tahoma"/>
               </a:rPr>
               <a:t>DATA PREPARATION</a:t>
             </a:r>
@@ -14739,6 +15179,8 @@
                   <a:srgbClr val="0F2038"/>
                 </a:solidFill>
                 <a:latin typeface="Tahoma"/>
+                <a:ea typeface="Tahoma"/>
+                <a:cs typeface="Tahoma"/>
               </a:rPr>
               <a:t>ทำความสะอาดข้อมูลโดยเสียข้อมูลเพียง 0.15%</a:t>
             </a:r>
@@ -14754,7 +15196,7 @@
         <p:spPr>
           <a:xfrm>
             <a:off x="548640" y="1554480"/>
-            <a:ext cx="7315200" cy="384048"/>
+            <a:ext cx="7315200" cy="566928"/>
           </a:xfrm>
           <a:prstGeom prst="rect">
             <a:avLst/>
@@ -14798,7 +15240,7 @@
         <p:spPr>
           <a:xfrm>
             <a:off x="658368" y="1627632"/>
-            <a:ext cx="2889504" cy="292608"/>
+            <a:ext cx="2889504" cy="475488"/>
           </a:xfrm>
           <a:prstGeom prst="rect">
             <a:avLst/>
@@ -14825,6 +15267,8 @@
                   <a:srgbClr val="FFFFFF"/>
                 </a:solidFill>
                 <a:latin typeface="Tahoma"/>
+                <a:ea typeface="Tahoma"/>
+                <a:cs typeface="Tahoma"/>
               </a:rPr>
               <a:t>ปัญหาที่พบ</a:t>
             </a:r>
@@ -14840,7 +15284,7 @@
         <p:spPr>
           <a:xfrm>
             <a:off x="3767328" y="1627632"/>
-            <a:ext cx="2706624" cy="292608"/>
+            <a:ext cx="2706624" cy="475488"/>
           </a:xfrm>
           <a:prstGeom prst="rect">
             <a:avLst/>
@@ -14867,6 +15311,8 @@
                   <a:srgbClr val="FFFFFF"/>
                 </a:solidFill>
                 <a:latin typeface="Tahoma"/>
+                <a:ea typeface="Tahoma"/>
+                <a:cs typeface="Tahoma"/>
               </a:rPr>
               <a:t>วิธีจัดการ</a:t>
             </a:r>
@@ -14882,7 +15328,7 @@
         <p:spPr>
           <a:xfrm>
             <a:off x="6693408" y="1627632"/>
-            <a:ext cx="1060704" cy="292608"/>
+            <a:ext cx="1060704" cy="475488"/>
           </a:xfrm>
           <a:prstGeom prst="rect">
             <a:avLst/>
@@ -14909,6 +15355,8 @@
                   <a:srgbClr val="FFFFFF"/>
                 </a:solidFill>
                 <a:latin typeface="Tahoma"/>
+                <a:ea typeface="Tahoma"/>
+                <a:cs typeface="Tahoma"/>
               </a:rPr>
               <a:t>แถวที่เสีย</a:t>
             </a:r>
@@ -14923,8 +15371,8 @@
         </p:nvSpPr>
         <p:spPr>
           <a:xfrm>
-            <a:off x="658368" y="2011680"/>
-            <a:ext cx="2889504" cy="292608"/>
+            <a:off x="658368" y="2194560"/>
+            <a:ext cx="2889504" cy="475488"/>
           </a:xfrm>
           <a:prstGeom prst="rect">
             <a:avLst/>
@@ -14951,6 +15399,8 @@
                   <a:srgbClr val="1F2C3D"/>
                 </a:solidFill>
                 <a:latin typeface="Tahoma"/>
+                <a:ea typeface="Tahoma"/>
+                <a:cs typeface="Tahoma"/>
               </a:rPr>
               <a:t>children ว่าง 4 ค่า</a:t>
             </a:r>
@@ -14965,8 +15415,8 @@
         </p:nvSpPr>
         <p:spPr>
           <a:xfrm>
-            <a:off x="3767328" y="2011680"/>
-            <a:ext cx="2706624" cy="292608"/>
+            <a:off x="3767328" y="2194560"/>
+            <a:ext cx="2706624" cy="475488"/>
           </a:xfrm>
           <a:prstGeom prst="rect">
             <a:avLst/>
@@ -14993,6 +15443,8 @@
                   <a:srgbClr val="1F2C3D"/>
                 </a:solidFill>
                 <a:latin typeface="Tahoma"/>
+                <a:ea typeface="Tahoma"/>
+                <a:cs typeface="Tahoma"/>
               </a:rPr>
               <a:t>เติมด้วย 0</a:t>
             </a:r>
@@ -15007,8 +15459,8 @@
         </p:nvSpPr>
         <p:spPr>
           <a:xfrm>
-            <a:off x="6693408" y="2011680"/>
-            <a:ext cx="1060704" cy="292608"/>
+            <a:off x="6693408" y="2194560"/>
+            <a:ext cx="1060704" cy="475488"/>
           </a:xfrm>
           <a:prstGeom prst="rect">
             <a:avLst/>
@@ -15035,6 +15487,8 @@
                   <a:srgbClr val="1F2C3D"/>
                 </a:solidFill>
                 <a:latin typeface="Tahoma"/>
+                <a:ea typeface="Tahoma"/>
+                <a:cs typeface="Tahoma"/>
               </a:rPr>
               <a:t>0</a:t>
             </a:r>
@@ -15049,8 +15503,8 @@
         </p:nvSpPr>
         <p:spPr>
           <a:xfrm>
-            <a:off x="548640" y="2322576"/>
-            <a:ext cx="7315200" cy="384048"/>
+            <a:off x="548640" y="2688336"/>
+            <a:ext cx="7315200" cy="566928"/>
           </a:xfrm>
           <a:prstGeom prst="rect">
             <a:avLst/>
@@ -15093,8 +15547,8 @@
         </p:nvSpPr>
         <p:spPr>
           <a:xfrm>
-            <a:off x="658368" y="2395728"/>
-            <a:ext cx="2889504" cy="292608"/>
+            <a:off x="658368" y="2761488"/>
+            <a:ext cx="2889504" cy="475488"/>
           </a:xfrm>
           <a:prstGeom prst="rect">
             <a:avLst/>
@@ -15121,6 +15575,8 @@
                   <a:srgbClr val="1F2C3D"/>
                 </a:solidFill>
                 <a:latin typeface="Tahoma"/>
+                <a:ea typeface="Tahoma"/>
+                <a:cs typeface="Tahoma"/>
               </a:rPr>
               <a:t>country ว่าง 488 ค่า</a:t>
             </a:r>
@@ -15135,8 +15591,8 @@
         </p:nvSpPr>
         <p:spPr>
           <a:xfrm>
-            <a:off x="3767328" y="2395728"/>
-            <a:ext cx="2706624" cy="292608"/>
+            <a:off x="3767328" y="2761488"/>
+            <a:ext cx="2706624" cy="475488"/>
           </a:xfrm>
           <a:prstGeom prst="rect">
             <a:avLst/>
@@ -15163,6 +15619,8 @@
                   <a:srgbClr val="1F2C3D"/>
                 </a:solidFill>
                 <a:latin typeface="Tahoma"/>
+                <a:ea typeface="Tahoma"/>
+                <a:cs typeface="Tahoma"/>
               </a:rPr>
               <a:t>แทนด้วย Unknown</a:t>
             </a:r>
@@ -15177,8 +15635,8 @@
         </p:nvSpPr>
         <p:spPr>
           <a:xfrm>
-            <a:off x="6693408" y="2395728"/>
-            <a:ext cx="1060704" cy="292608"/>
+            <a:off x="6693408" y="2761488"/>
+            <a:ext cx="1060704" cy="475488"/>
           </a:xfrm>
           <a:prstGeom prst="rect">
             <a:avLst/>
@@ -15205,6 +15663,8 @@
                   <a:srgbClr val="1F2C3D"/>
                 </a:solidFill>
                 <a:latin typeface="Tahoma"/>
+                <a:ea typeface="Tahoma"/>
+                <a:cs typeface="Tahoma"/>
               </a:rPr>
               <a:t>0</a:t>
             </a:r>
@@ -15219,8 +15679,8 @@
         </p:nvSpPr>
         <p:spPr>
           <a:xfrm>
-            <a:off x="658368" y="2779776"/>
-            <a:ext cx="2889504" cy="292608"/>
+            <a:off x="658368" y="3328416"/>
+            <a:ext cx="2889504" cy="475488"/>
           </a:xfrm>
           <a:prstGeom prst="rect">
             <a:avLst/>
@@ -15247,6 +15707,8 @@
                   <a:srgbClr val="1F2C3D"/>
                 </a:solidFill>
                 <a:latin typeface="Tahoma"/>
+                <a:ea typeface="Tahoma"/>
+                <a:cs typeface="Tahoma"/>
               </a:rPr>
               <a:t>agent / company ว่าง</a:t>
             </a:r>
@@ -15261,8 +15723,8 @@
         </p:nvSpPr>
         <p:spPr>
           <a:xfrm>
-            <a:off x="3767328" y="2779776"/>
-            <a:ext cx="2706624" cy="292608"/>
+            <a:off x="3767328" y="3328416"/>
+            <a:ext cx="2706624" cy="475488"/>
           </a:xfrm>
           <a:prstGeom prst="rect">
             <a:avLst/>
@@ -15289,6 +15751,8 @@
                   <a:srgbClr val="1F2C3D"/>
                 </a:solidFill>
                 <a:latin typeface="Tahoma"/>
+                <a:ea typeface="Tahoma"/>
+                <a:cs typeface="Tahoma"/>
               </a:rPr>
               <a:t>แปลงเป็น flag มี/ไม่มี</a:t>
             </a:r>
@@ -15303,8 +15767,8 @@
         </p:nvSpPr>
         <p:spPr>
           <a:xfrm>
-            <a:off x="6693408" y="2779776"/>
-            <a:ext cx="1060704" cy="292608"/>
+            <a:off x="6693408" y="3328416"/>
+            <a:ext cx="1060704" cy="475488"/>
           </a:xfrm>
           <a:prstGeom prst="rect">
             <a:avLst/>
@@ -15331,6 +15795,8 @@
                   <a:srgbClr val="1F2C3D"/>
                 </a:solidFill>
                 <a:latin typeface="Tahoma"/>
+                <a:ea typeface="Tahoma"/>
+                <a:cs typeface="Tahoma"/>
               </a:rPr>
               <a:t>0</a:t>
             </a:r>
@@ -15345,8 +15811,8 @@
         </p:nvSpPr>
         <p:spPr>
           <a:xfrm>
-            <a:off x="548640" y="3090672"/>
-            <a:ext cx="7315200" cy="384048"/>
+            <a:off x="548640" y="3822192"/>
+            <a:ext cx="7315200" cy="566928"/>
           </a:xfrm>
           <a:prstGeom prst="rect">
             <a:avLst/>
@@ -15389,8 +15855,8 @@
         </p:nvSpPr>
         <p:spPr>
           <a:xfrm>
-            <a:off x="658368" y="3163824"/>
-            <a:ext cx="2889504" cy="292608"/>
+            <a:off x="658368" y="3895344"/>
+            <a:ext cx="2889504" cy="475488"/>
           </a:xfrm>
           <a:prstGeom prst="rect">
             <a:avLst/>
@@ -15417,6 +15883,8 @@
                   <a:srgbClr val="1F2C3D"/>
                 </a:solidFill>
                 <a:latin typeface="Tahoma"/>
+                <a:ea typeface="Tahoma"/>
+                <a:cs typeface="Tahoma"/>
               </a:rPr>
               <a:t>ไม่มีผู้เข้าพัก</a:t>
             </a:r>
@@ -15431,8 +15899,8 @@
         </p:nvSpPr>
         <p:spPr>
           <a:xfrm>
-            <a:off x="3767328" y="3163824"/>
-            <a:ext cx="2706624" cy="292608"/>
+            <a:off x="3767328" y="3895344"/>
+            <a:ext cx="2706624" cy="475488"/>
           </a:xfrm>
           <a:prstGeom prst="rect">
             <a:avLst/>
@@ -15459,6 +15927,8 @@
                   <a:srgbClr val="1F2C3D"/>
                 </a:solidFill>
                 <a:latin typeface="Tahoma"/>
+                <a:ea typeface="Tahoma"/>
+                <a:cs typeface="Tahoma"/>
               </a:rPr>
               <a:t>ลบแถวทิ้ง</a:t>
             </a:r>
@@ -15473,8 +15943,8 @@
         </p:nvSpPr>
         <p:spPr>
           <a:xfrm>
-            <a:off x="6693408" y="3163824"/>
-            <a:ext cx="1060704" cy="292608"/>
+            <a:off x="6693408" y="3895344"/>
+            <a:ext cx="1060704" cy="475488"/>
           </a:xfrm>
           <a:prstGeom prst="rect">
             <a:avLst/>
@@ -15501,6 +15971,8 @@
                   <a:srgbClr val="0F2038"/>
                 </a:solidFill>
                 <a:latin typeface="Tahoma"/>
+                <a:ea typeface="Tahoma"/>
+                <a:cs typeface="Tahoma"/>
               </a:rPr>
               <a:t>180</a:t>
             </a:r>
@@ -15515,8 +15987,8 @@
         </p:nvSpPr>
         <p:spPr>
           <a:xfrm>
-            <a:off x="658368" y="3547872"/>
-            <a:ext cx="2889504" cy="292608"/>
+            <a:off x="658368" y="4462272"/>
+            <a:ext cx="2889504" cy="475488"/>
           </a:xfrm>
           <a:prstGeom prst="rect">
             <a:avLst/>
@@ -15543,6 +16015,8 @@
                   <a:srgbClr val="1F2C3D"/>
                 </a:solidFill>
                 <a:latin typeface="Tahoma"/>
+                <a:ea typeface="Tahoma"/>
+                <a:cs typeface="Tahoma"/>
               </a:rPr>
               <a:t>adr ติดลบ / เกิน 1,000</a:t>
             </a:r>
@@ -15557,8 +16031,8 @@
         </p:nvSpPr>
         <p:spPr>
           <a:xfrm>
-            <a:off x="3767328" y="3547872"/>
-            <a:ext cx="2706624" cy="292608"/>
+            <a:off x="3767328" y="4462272"/>
+            <a:ext cx="2706624" cy="475488"/>
           </a:xfrm>
           <a:prstGeom prst="rect">
             <a:avLst/>
@@ -15585,6 +16059,8 @@
                   <a:srgbClr val="1F2C3D"/>
                 </a:solidFill>
                 <a:latin typeface="Tahoma"/>
+                <a:ea typeface="Tahoma"/>
+                <a:cs typeface="Tahoma"/>
               </a:rPr>
               <a:t>ลบแถวทิ้ง</a:t>
             </a:r>
@@ -15599,8 +16075,8 @@
         </p:nvSpPr>
         <p:spPr>
           <a:xfrm>
-            <a:off x="6693408" y="3547872"/>
-            <a:ext cx="1060704" cy="292608"/>
+            <a:off x="6693408" y="4462272"/>
+            <a:ext cx="1060704" cy="475488"/>
           </a:xfrm>
           <a:prstGeom prst="rect">
             <a:avLst/>
@@ -15627,6 +16103,8 @@
                   <a:srgbClr val="0F2038"/>
                 </a:solidFill>
                 <a:latin typeface="Tahoma"/>
+                <a:ea typeface="Tahoma"/>
+                <a:cs typeface="Tahoma"/>
               </a:rPr>
               <a:t>2</a:t>
             </a:r>
@@ -15641,8 +16119,8 @@
         </p:nvSpPr>
         <p:spPr>
           <a:xfrm>
-            <a:off x="8229600" y="1554480"/>
-            <a:ext cx="3383280" cy="1188720"/>
+            <a:off x="8229600" y="1572768"/>
+            <a:ext cx="3383280" cy="1463040"/>
           </a:xfrm>
           <a:prstGeom prst="roundRect">
             <a:avLst>
@@ -15687,8 +16165,8 @@
         </p:nvSpPr>
         <p:spPr>
           <a:xfrm>
-            <a:off x="8339328" y="1664208"/>
-            <a:ext cx="3163824" cy="621792"/>
+            <a:off x="8339328" y="1682496"/>
+            <a:ext cx="3163824" cy="896112"/>
           </a:xfrm>
           <a:prstGeom prst="rect">
             <a:avLst/>
@@ -15715,6 +16193,8 @@
                   <a:srgbClr val="0F2038"/>
                 </a:solidFill>
                 <a:latin typeface="Tahoma"/>
+                <a:ea typeface="Tahoma"/>
+                <a:cs typeface="Tahoma"/>
               </a:rPr>
               <a:t>119,390 → 119,208</a:t>
             </a:r>
@@ -15729,7 +16209,7 @@
         </p:nvSpPr>
         <p:spPr>
           <a:xfrm>
-            <a:off x="8339328" y="2395728"/>
+            <a:off x="8339328" y="2688336"/>
             <a:ext cx="3163824" cy="274320"/>
           </a:xfrm>
           <a:prstGeom prst="rect">
@@ -15757,6 +16237,8 @@
                   <a:srgbClr val="6B7A8C"/>
                 </a:solidFill>
                 <a:latin typeface="Tahoma"/>
+                <a:ea typeface="Tahoma"/>
+                <a:cs typeface="Tahoma"/>
               </a:rPr>
               <a:t>จำนวนแถวก่อน → หลังคลีน</a:t>
             </a:r>
@@ -15771,8 +16253,8 @@
         </p:nvSpPr>
         <p:spPr>
           <a:xfrm>
-            <a:off x="8229600" y="2926080"/>
-            <a:ext cx="3383280" cy="1188720"/>
+            <a:off x="8229600" y="3200400"/>
+            <a:ext cx="3383280" cy="1463040"/>
           </a:xfrm>
           <a:prstGeom prst="roundRect">
             <a:avLst>
@@ -15817,8 +16299,8 @@
         </p:nvSpPr>
         <p:spPr>
           <a:xfrm>
-            <a:off x="8339328" y="3035808"/>
-            <a:ext cx="3163824" cy="621792"/>
+            <a:off x="8339328" y="3310128"/>
+            <a:ext cx="3163824" cy="896112"/>
           </a:xfrm>
           <a:prstGeom prst="rect">
             <a:avLst/>
@@ -15845,6 +16327,8 @@
                   <a:srgbClr val="E0A458"/>
                 </a:solidFill>
                 <a:latin typeface="Tahoma"/>
+                <a:ea typeface="Tahoma"/>
+                <a:cs typeface="Tahoma"/>
               </a:rPr>
               <a:t>182 แถว</a:t>
             </a:r>
@@ -15859,7 +16343,7 @@
         </p:nvSpPr>
         <p:spPr>
           <a:xfrm>
-            <a:off x="8339328" y="3767328"/>
+            <a:off x="8339328" y="4315968"/>
             <a:ext cx="3163824" cy="274320"/>
           </a:xfrm>
           <a:prstGeom prst="rect">
@@ -15887,6 +16371,8 @@
                   <a:srgbClr val="6B7A8C"/>
                 </a:solidFill>
                 <a:latin typeface="Tahoma"/>
+                <a:ea typeface="Tahoma"/>
+                <a:cs typeface="Tahoma"/>
               </a:rPr>
               <a:t>ลบทิ้งทั้งหมด คิดเป็น 0.15%</a:t>
             </a:r>
@@ -15901,7 +16387,7 @@
         </p:nvSpPr>
         <p:spPr>
           <a:xfrm>
-            <a:off x="8229600" y="4343400"/>
+            <a:off x="8229600" y="4892040"/>
             <a:ext cx="3383280" cy="1097280"/>
           </a:xfrm>
           <a:prstGeom prst="rect">
@@ -15929,6 +16415,8 @@
                   <a:srgbClr val="6B7A8C"/>
                 </a:solidFill>
                 <a:latin typeface="Tahoma"/>
+                <a:ea typeface="Tahoma"/>
+                <a:cs typeface="Tahoma"/>
               </a:rPr>
               <a:t>อัตรายกเลิกหลังคลีน 37.08%
 แทบไม่ต่างจาก 37.04% ก่อนคลีน
@@ -15945,7 +16433,7 @@
         </p:nvSpPr>
         <p:spPr>
           <a:xfrm>
-            <a:off x="548640" y="4133088"/>
+            <a:off x="548640" y="5230368"/>
             <a:ext cx="7315200" cy="548640"/>
           </a:xfrm>
           <a:prstGeom prst="rect">
@@ -15973,6 +16461,8 @@
                   <a:srgbClr val="6B7A8C"/>
                 </a:solidFill>
                 <a:latin typeface="Tahoma"/>
+                <a:ea typeface="Tahoma"/>
+                <a:cs typeface="Tahoma"/>
               </a:rPr>
               <a:t>ค่าว่างใน agent / company ตามเปเปอร์ต้นฉบับแปลว่า “ไม่เกี่ยวข้อง” ไม่ใช่ข้อมูลหาย จึงทำเป็น flag แทนการเติมค่า</a:t>
             </a:r>
@@ -16088,6 +16578,8 @@
                   <a:srgbClr val="0F2038"/>
                 </a:solidFill>
                 <a:latin typeface="Tahoma"/>
+                <a:ea typeface="Tahoma"/>
+                <a:cs typeface="Tahoma"/>
               </a:rPr>
               <a:t>6</a:t>
             </a:r>
@@ -16130,6 +16622,8 @@
                   <a:srgbClr val="E0A458"/>
                 </a:solidFill>
                 <a:latin typeface="Tahoma"/>
+                <a:ea typeface="Tahoma"/>
+                <a:cs typeface="Tahoma"/>
               </a:rPr>
               <a:t>DATA LEAKAGE</a:t>
             </a:r>
@@ -16172,6 +16666,8 @@
                   <a:srgbClr val="0F2038"/>
                 </a:solidFill>
                 <a:latin typeface="Tahoma"/>
+                <a:ea typeface="Tahoma"/>
+                <a:cs typeface="Tahoma"/>
               </a:rPr>
               <a:t>ตัด 3 คอลัมน์ที่แอบรู้คำตอบ ก่อนแบ่งข้อมูล</a:t>
             </a:r>
@@ -16260,6 +16756,8 @@
                   <a:srgbClr val="B33A3A"/>
                 </a:solidFill>
                 <a:latin typeface="Tahoma"/>
+                <a:ea typeface="Tahoma"/>
+                <a:cs typeface="Tahoma"/>
               </a:rPr>
               <a:t>คอลัมน์ที่ตัดออก</a:t>
             </a:r>
@@ -16288,7 +16786,7 @@
           </a:bodyPr>
           <a:lstStyle/>
           <a:p>
-            <a:pPr algn="l">
+            <a:pPr algn="l" marL="201168" indent="-201168">
               <a:lnSpc>
                 <a:spcPct val="125000"/>
               </a:lnSpc>
@@ -16302,6 +16800,8 @@
                   <a:srgbClr val="E0A458"/>
                 </a:solidFill>
                 <a:latin typeface="Tahoma"/>
+                <a:ea typeface="Tahoma"/>
+                <a:cs typeface="Tahoma"/>
               </a:rPr>
               <a:t>•  </a:t>
             </a:r>
@@ -16311,12 +16811,14 @@
                   <a:srgbClr val="1F2C3D"/>
                 </a:solidFill>
                 <a:latin typeface="Tahoma"/>
+                <a:ea typeface="Tahoma"/>
+                <a:cs typeface="Tahoma"/>
               </a:rPr>
               <a:t>reservation_status — บอกผลลัพธ์ตรงๆ</a:t>
             </a:r>
           </a:p>
           <a:p>
-            <a:pPr algn="l">
+            <a:pPr algn="l" marL="201168" indent="-201168">
               <a:lnSpc>
                 <a:spcPct val="125000"/>
               </a:lnSpc>
@@ -16330,6 +16832,8 @@
                   <a:srgbClr val="E0A458"/>
                 </a:solidFill>
                 <a:latin typeface="Tahoma"/>
+                <a:ea typeface="Tahoma"/>
+                <a:cs typeface="Tahoma"/>
               </a:rPr>
               <a:t>•  </a:t>
             </a:r>
@@ -16339,12 +16843,14 @@
                   <a:srgbClr val="1F2C3D"/>
                 </a:solidFill>
                 <a:latin typeface="Tahoma"/>
+                <a:ea typeface="Tahoma"/>
+                <a:cs typeface="Tahoma"/>
               </a:rPr>
               <a:t>reservation_status_date — วันที่ผลลัพธ์เกิดขึ้น</a:t>
             </a:r>
           </a:p>
           <a:p>
-            <a:pPr algn="l">
+            <a:pPr algn="l" marL="201168" indent="-201168">
               <a:lnSpc>
                 <a:spcPct val="125000"/>
               </a:lnSpc>
@@ -16358,6 +16864,8 @@
                   <a:srgbClr val="E0A458"/>
                 </a:solidFill>
                 <a:latin typeface="Tahoma"/>
+                <a:ea typeface="Tahoma"/>
+                <a:cs typeface="Tahoma"/>
               </a:rPr>
               <a:t>•  </a:t>
             </a:r>
@@ -16367,6 +16875,8 @@
                   <a:srgbClr val="1F2C3D"/>
                 </a:solidFill>
                 <a:latin typeface="Tahoma"/>
+                <a:ea typeface="Tahoma"/>
+                <a:cs typeface="Tahoma"/>
               </a:rPr>
               <a:t>assigned_room_type — ห้องถูกกำหนดตอนเช็คอิน</a:t>
             </a:r>
@@ -16409,6 +16919,8 @@
                   <a:srgbClr val="B33A3A"/>
                 </a:solidFill>
                 <a:latin typeface="Tahoma"/>
+                <a:ea typeface="Tahoma"/>
+                <a:cs typeface="Tahoma"/>
               </a:rPr>
               <a:t>หลักฐาน: </a:t>
             </a:r>
@@ -16418,6 +16930,8 @@
                   <a:srgbClr val="0F2038"/>
                 </a:solidFill>
                 <a:latin typeface="Tahoma"/>
+                <a:ea typeface="Tahoma"/>
+                <a:cs typeface="Tahoma"/>
               </a:rPr>
               <a:t>การจองที่ถูกเปลี่ยนห้องมีอัตรายกเลิก 0% → รู้ผลหลังเช็คอินแล้ว</a:t>
             </a:r>
@@ -16460,6 +16974,8 @@
                   <a:srgbClr val="0F2038"/>
                 </a:solidFill>
                 <a:latin typeface="Tahoma"/>
+                <a:ea typeface="Tahoma"/>
+                <a:cs typeface="Tahoma"/>
               </a:rPr>
               <a:t>แบ่งข้อมูล 2 แบบ</a:t>
             </a:r>
@@ -16546,6 +17062,8 @@
                   <a:srgbClr val="FFFFFF"/>
                 </a:solidFill>
                 <a:latin typeface="Tahoma"/>
+                <a:ea typeface="Tahoma"/>
+                <a:cs typeface="Tahoma"/>
               </a:rPr>
               <a:t>วิธีแบ่ง</a:t>
             </a:r>
@@ -16588,6 +17106,8 @@
                   <a:srgbClr val="FFFFFF"/>
                 </a:solidFill>
                 <a:latin typeface="Tahoma"/>
+                <a:ea typeface="Tahoma"/>
+                <a:cs typeface="Tahoma"/>
               </a:rPr>
               <a:t>Train</a:t>
             </a:r>
@@ -16630,6 +17150,8 @@
                   <a:srgbClr val="FFFFFF"/>
                 </a:solidFill>
                 <a:latin typeface="Tahoma"/>
+                <a:ea typeface="Tahoma"/>
+                <a:cs typeface="Tahoma"/>
               </a:rPr>
               <a:t>Test</a:t>
             </a:r>
@@ -16672,6 +17194,8 @@
                   <a:srgbClr val="1F2C3D"/>
                 </a:solidFill>
                 <a:latin typeface="Tahoma"/>
+                <a:ea typeface="Tahoma"/>
+                <a:cs typeface="Tahoma"/>
               </a:rPr>
               <a:t>Stratified Random 80/20</a:t>
             </a:r>
@@ -16714,6 +17238,8 @@
                   <a:srgbClr val="1F2C3D"/>
                 </a:solidFill>
                 <a:latin typeface="Tahoma"/>
+                <a:ea typeface="Tahoma"/>
+                <a:cs typeface="Tahoma"/>
               </a:rPr>
               <a:t>95,366</a:t>
             </a:r>
@@ -16756,6 +17282,8 @@
                   <a:srgbClr val="1F2C3D"/>
                 </a:solidFill>
                 <a:latin typeface="Tahoma"/>
+                <a:ea typeface="Tahoma"/>
+                <a:cs typeface="Tahoma"/>
               </a:rPr>
               <a:t>23,842</a:t>
             </a:r>
@@ -16842,6 +17370,8 @@
                   <a:srgbClr val="1F2C3D"/>
                 </a:solidFill>
                 <a:latin typeface="Tahoma"/>
+                <a:ea typeface="Tahoma"/>
+                <a:cs typeface="Tahoma"/>
               </a:rPr>
               <a:t>Time-based (ตามเวลา)</a:t>
             </a:r>
@@ -16884,6 +17414,8 @@
                   <a:srgbClr val="1F2C3D"/>
                 </a:solidFill>
                 <a:latin typeface="Tahoma"/>
+                <a:ea typeface="Tahoma"/>
+                <a:cs typeface="Tahoma"/>
               </a:rPr>
               <a:t>95,190</a:t>
             </a:r>
@@ -16926,6 +17458,8 @@
                   <a:srgbClr val="1F2C3D"/>
                 </a:solidFill>
                 <a:latin typeface="Tahoma"/>
+                <a:ea typeface="Tahoma"/>
+                <a:cs typeface="Tahoma"/>
               </a:rPr>
               <a:t>24,018</a:t>
             </a:r>
@@ -16968,6 +17502,8 @@
                   <a:srgbClr val="6B7A8C"/>
                 </a:solidFill>
                 <a:latin typeface="Tahoma"/>
+                <a:ea typeface="Tahoma"/>
+                <a:cs typeface="Tahoma"/>
               </a:rPr>
               <a:t>Time split: train มีอัตรายกเลิก 36.09% แต่ test มี 40.99%
 → พฤติกรรมเปลี่ยนตามเวลาจริง (ดูหน้า 14)</a:t>
@@ -17011,6 +17547,8 @@
                   <a:srgbClr val="6B7A8C"/>
                 </a:solidFill>
                 <a:latin typeface="Tahoma"/>
+                <a:ea typeface="Tahoma"/>
+                <a:cs typeface="Tahoma"/>
               </a:rPr>
               <a:t>encoding · scaling · feature selection ทั้งหมดอยู่ใน Pipeline จึงเรียนรู้จาก train ของแต่ละ fold เท่านั้น — Test set ถูกเปิดใช้ครั้งเดียวตอนท้าย</a:t>
             </a:r>
@@ -17126,6 +17664,8 @@
                   <a:srgbClr val="0F2038"/>
                 </a:solidFill>
                 <a:latin typeface="Tahoma"/>
+                <a:ea typeface="Tahoma"/>
+                <a:cs typeface="Tahoma"/>
               </a:rPr>
               <a:t>7</a:t>
             </a:r>
@@ -17168,6 +17708,8 @@
                   <a:srgbClr val="E0A458"/>
                 </a:solidFill>
                 <a:latin typeface="Tahoma"/>
+                <a:ea typeface="Tahoma"/>
+                <a:cs typeface="Tahoma"/>
               </a:rPr>
               <a:t>FEATURE ENGINEERING</a:t>
             </a:r>
@@ -17210,6 +17752,8 @@
                   <a:srgbClr val="0F2038"/>
                 </a:solidFill>
                 <a:latin typeface="Tahoma"/>
+                <a:ea typeface="Tahoma"/>
+                <a:cs typeface="Tahoma"/>
               </a:rPr>
               <a:t>สร้าง 9 features ใหม่ — ทุกตัวมีสมมติฐานรองรับ</a:t>
             </a:r>
@@ -17276,6 +17820,8 @@
                   <a:srgbClr val="0F2038"/>
                 </a:solidFill>
                 <a:latin typeface="Tahoma"/>
+                <a:ea typeface="Tahoma"/>
+                <a:cs typeface="Tahoma"/>
               </a:rPr>
               <a:t>ช่วงห่างของอัตรายกเลิกระหว่างกลุ่ม</a:t>
             </a:r>
@@ -17362,6 +17908,8 @@
                   <a:srgbClr val="FFFFFF"/>
                 </a:solidFill>
                 <a:latin typeface="Tahoma"/>
+                <a:ea typeface="Tahoma"/>
+                <a:cs typeface="Tahoma"/>
               </a:rPr>
               <a:t>Feature ใหม่</a:t>
             </a:r>
@@ -17404,6 +17952,8 @@
                   <a:srgbClr val="FFFFFF"/>
                 </a:solidFill>
                 <a:latin typeface="Tahoma"/>
+                <a:ea typeface="Tahoma"/>
+                <a:cs typeface="Tahoma"/>
               </a:rPr>
               <a:t>ช่วงห่าง</a:t>
             </a:r>
@@ -17490,6 +18040,8 @@
                   <a:srgbClr val="1F2C3D"/>
                 </a:solidFill>
                 <a:latin typeface="Tahoma"/>
+                <a:ea typeface="Tahoma"/>
+                <a:cs typeface="Tahoma"/>
               </a:rPr>
               <a:t>cancel_history_ratio</a:t>
             </a:r>
@@ -17532,6 +18084,8 @@
                   <a:srgbClr val="0F2038"/>
                 </a:solidFill>
                 <a:latin typeface="Tahoma"/>
+                <a:ea typeface="Tahoma"/>
+                <a:cs typeface="Tahoma"/>
               </a:rPr>
               <a:t>81.6%</a:t>
             </a:r>
@@ -17618,6 +18172,8 @@
                   <a:srgbClr val="1F2C3D"/>
                 </a:solidFill>
                 <a:latin typeface="Tahoma"/>
+                <a:ea typeface="Tahoma"/>
+                <a:cs typeface="Tahoma"/>
               </a:rPr>
               <a:t>lead_time_group</a:t>
             </a:r>
@@ -17660,6 +18216,8 @@
                   <a:srgbClr val="0F2038"/>
                 </a:solidFill>
                 <a:latin typeface="Tahoma"/>
+                <a:ea typeface="Tahoma"/>
+                <a:cs typeface="Tahoma"/>
               </a:rPr>
               <a:t>58.1%</a:t>
             </a:r>
@@ -17702,6 +18260,8 @@
                   <a:srgbClr val="1F2C3D"/>
                 </a:solidFill>
                 <a:latin typeface="Tahoma"/>
+                <a:ea typeface="Tahoma"/>
+                <a:cs typeface="Tahoma"/>
               </a:rPr>
               <a:t>total_nights</a:t>
             </a:r>
@@ -17744,6 +18304,8 @@
                   <a:srgbClr val="1F2C3D"/>
                 </a:solidFill>
                 <a:latin typeface="Tahoma"/>
+                <a:ea typeface="Tahoma"/>
+                <a:cs typeface="Tahoma"/>
               </a:rPr>
               <a:t>52.8%</a:t>
             </a:r>
@@ -17830,6 +18392,8 @@
                   <a:srgbClr val="1F2C3D"/>
                 </a:solidFill>
                 <a:latin typeface="Tahoma"/>
+                <a:ea typeface="Tahoma"/>
+                <a:cs typeface="Tahoma"/>
               </a:rPr>
               <a:t>is_domestic</a:t>
             </a:r>
@@ -17872,6 +18436,8 @@
                   <a:srgbClr val="1F2C3D"/>
                 </a:solidFill>
                 <a:latin typeface="Tahoma"/>
+                <a:ea typeface="Tahoma"/>
+                <a:cs typeface="Tahoma"/>
               </a:rPr>
               <a:t>33.1%</a:t>
             </a:r>
@@ -17914,6 +18480,8 @@
                   <a:srgbClr val="6B7A8C"/>
                 </a:solidFill>
                 <a:latin typeface="Tahoma"/>
+                <a:ea typeface="Tahoma"/>
+                <a:cs typeface="Tahoma"/>
               </a:rPr>
               <a:t>ยิ่งช่วงห่างกว้าง feature ยิ่งแยกกลุ่มคนที่จะยกเลิกออกจากคนที่ไม่ยกเลิกได้ดี
 ตั้งสมมติฐานก่อน แล้วค่อยพิสูจน์ด้วยกราฟ ไม่ได้สร้างมั่วแล้วลองดู</a:t>
@@ -18030,6 +18598,8 @@
                   <a:srgbClr val="0F2038"/>
                 </a:solidFill>
                 <a:latin typeface="Tahoma"/>
+                <a:ea typeface="Tahoma"/>
+                <a:cs typeface="Tahoma"/>
               </a:rPr>
               <a:t>8</a:t>
             </a:r>
@@ -18072,6 +18642,8 @@
                   <a:srgbClr val="E0A458"/>
                 </a:solidFill>
                 <a:latin typeface="Tahoma"/>
+                <a:ea typeface="Tahoma"/>
+                <a:cs typeface="Tahoma"/>
               </a:rPr>
               <a:t>FEATURE SELECTION</a:t>
             </a:r>
@@ -18114,6 +18686,8 @@
                   <a:srgbClr val="0F2038"/>
                 </a:solidFill>
                 <a:latin typeface="Tahoma"/>
+                <a:ea typeface="Tahoma"/>
+                <a:cs typeface="Tahoma"/>
               </a:rPr>
               <a:t>37 features → 18 features ด้วยการโหวต 2 ใน 3</a:t>
             </a:r>
@@ -18156,6 +18730,8 @@
                   <a:srgbClr val="0F2038"/>
                 </a:solidFill>
                 <a:latin typeface="Tahoma"/>
+                <a:ea typeface="Tahoma"/>
+                <a:cs typeface="Tahoma"/>
               </a:rPr>
               <a:t>Mutual Information</a:t>
             </a:r>
@@ -18198,6 +18774,8 @@
                   <a:srgbClr val="6B7A8C"/>
                 </a:solidFill>
                 <a:latin typeface="Tahoma"/>
+                <a:ea typeface="Tahoma"/>
+                <a:cs typeface="Tahoma"/>
               </a:rPr>
               <a:t>Filter — สถิติล้วน</a:t>
             </a:r>
@@ -18206,7 +18784,7 @@
       </p:sp>
       <p:pic>
         <p:nvPicPr>
-          <p:cNvPr id="8" name="Picture 7" descr="5_mutual_information.png"/>
+          <p:cNvPr id="8" name="Picture 7" descr="5_mutual_information_top.png"/>
           <p:cNvPicPr>
             <a:picLocks noChangeAspect="1"/>
           </p:cNvPicPr>
@@ -18220,8 +18798,8 @@
         </p:blipFill>
         <p:spPr>
           <a:xfrm>
-            <a:off x="1108152" y="1920240"/>
-            <a:ext cx="2447135" cy="3017520"/>
+            <a:off x="548640" y="2220915"/>
+            <a:ext cx="3566160" cy="2416170"/>
           </a:xfrm>
           <a:prstGeom prst="rect">
             <a:avLst/>
@@ -18264,6 +18842,8 @@
                   <a:srgbClr val="0F2038"/>
                 </a:solidFill>
                 <a:latin typeface="Tahoma"/>
+                <a:ea typeface="Tahoma"/>
+                <a:cs typeface="Tahoma"/>
               </a:rPr>
               <a:t>RF Importance</a:t>
             </a:r>
@@ -18306,6 +18886,8 @@
                   <a:srgbClr val="6B7A8C"/>
                 </a:solidFill>
                 <a:latin typeface="Tahoma"/>
+                <a:ea typeface="Tahoma"/>
+                <a:cs typeface="Tahoma"/>
               </a:rPr>
               <a:t>Embedded — จากตัวโมเดล</a:t>
             </a:r>
@@ -18314,7 +18896,7 @@
       </p:sp>
       <p:pic>
         <p:nvPicPr>
-          <p:cNvPr id="11" name="Picture 10" descr="5_random_forest_importance.png"/>
+          <p:cNvPr id="11" name="Picture 10" descr="5_random_forest_importance_top.png"/>
           <p:cNvPicPr>
             <a:picLocks noChangeAspect="1"/>
           </p:cNvPicPr>
@@ -18328,8 +18910,8 @@
         </p:blipFill>
         <p:spPr>
           <a:xfrm>
-            <a:off x="4966920" y="1920240"/>
-            <a:ext cx="2447135" cy="3017520"/>
+            <a:off x="4407408" y="2220915"/>
+            <a:ext cx="3566160" cy="2416170"/>
           </a:xfrm>
           <a:prstGeom prst="rect">
             <a:avLst/>
@@ -18372,6 +18954,8 @@
                   <a:srgbClr val="0F2038"/>
                 </a:solidFill>
                 <a:latin typeface="Tahoma"/>
+                <a:ea typeface="Tahoma"/>
+                <a:cs typeface="Tahoma"/>
               </a:rPr>
               <a:t>Permutation Importance</a:t>
             </a:r>
@@ -18414,6 +18998,8 @@
                   <a:srgbClr val="6B7A8C"/>
                 </a:solidFill>
                 <a:latin typeface="Tahoma"/>
+                <a:ea typeface="Tahoma"/>
+                <a:cs typeface="Tahoma"/>
               </a:rPr>
               <a:t>Model-agnostic — วัดบน validation</a:t>
             </a:r>
@@ -18422,7 +19008,7 @@
       </p:sp>
       <p:pic>
         <p:nvPicPr>
-          <p:cNvPr id="14" name="Picture 13" descr="5_permutation_importance.png"/>
+          <p:cNvPr id="14" name="Picture 13" descr="5_permutation_importance_top.png"/>
           <p:cNvPicPr>
             <a:picLocks noChangeAspect="1"/>
           </p:cNvPicPr>
@@ -18436,8 +19022,8 @@
         </p:blipFill>
         <p:spPr>
           <a:xfrm>
-            <a:off x="8825688" y="1920240"/>
-            <a:ext cx="2447135" cy="3017520"/>
+            <a:off x="8266176" y="2220915"/>
+            <a:ext cx="3566160" cy="2416170"/>
           </a:xfrm>
           <a:prstGeom prst="rect">
             <a:avLst/>
@@ -18526,6 +19112,8 @@
                   <a:srgbClr val="0F2038"/>
                 </a:solidFill>
                 <a:latin typeface="Tahoma"/>
+                <a:ea typeface="Tahoma"/>
+                <a:cs typeface="Tahoma"/>
               </a:rPr>
               <a:t>14 ตัว</a:t>
             </a:r>
@@ -18568,6 +19156,8 @@
                   <a:srgbClr val="6B7A8C"/>
                 </a:solidFill>
                 <a:latin typeface="Tahoma"/>
+                <a:ea typeface="Tahoma"/>
+                <a:cs typeface="Tahoma"/>
               </a:rPr>
               <a:t>ได้ครบ 3 โหวต</a:t>
             </a:r>
@@ -18656,6 +19246,8 @@
                   <a:srgbClr val="0F2038"/>
                 </a:solidFill>
                 <a:latin typeface="Tahoma"/>
+                <a:ea typeface="Tahoma"/>
+                <a:cs typeface="Tahoma"/>
               </a:rPr>
               <a:t>4 ตัว</a:t>
             </a:r>
@@ -18698,6 +19290,8 @@
                   <a:srgbClr val="6B7A8C"/>
                 </a:solidFill>
                 <a:latin typeface="Tahoma"/>
+                <a:ea typeface="Tahoma"/>
+                <a:cs typeface="Tahoma"/>
               </a:rPr>
               <a:t>ได้ 2 โหวต</a:t>
             </a:r>
@@ -18786,6 +19380,8 @@
                   <a:srgbClr val="E0A458"/>
                 </a:solidFill>
                 <a:latin typeface="Tahoma"/>
+                <a:ea typeface="Tahoma"/>
+                <a:cs typeface="Tahoma"/>
               </a:rPr>
               <a:t>18 ตัว</a:t>
             </a:r>
@@ -18828,6 +19424,8 @@
                   <a:srgbClr val="6B7A8C"/>
                 </a:solidFill>
                 <a:latin typeface="Tahoma"/>
+                <a:ea typeface="Tahoma"/>
+                <a:cs typeface="Tahoma"/>
               </a:rPr>
               <a:t>เก็บไว้ใช้เทรน</a:t>
             </a:r>
@@ -18870,6 +19468,8 @@
                   <a:srgbClr val="6B7A8C"/>
                 </a:solidFill>
                 <a:latin typeface="Tahoma"/>
+                <a:ea typeface="Tahoma"/>
+                <a:cs typeface="Tahoma"/>
               </a:rPr>
               <a:t>RF Importance มีอคติเข้าข้างตัวแปรที่มีค่าหลากหลาย จึงใช้ Permutation Importance ที่วัดบน validation set เป็นตัวถ่วง</a:t>
             </a:r>
@@ -18985,6 +19585,8 @@
                   <a:srgbClr val="0F2038"/>
                 </a:solidFill>
                 <a:latin typeface="Tahoma"/>
+                <a:ea typeface="Tahoma"/>
+                <a:cs typeface="Tahoma"/>
               </a:rPr>
               <a:t>9</a:t>
             </a:r>
@@ -19027,6 +19629,8 @@
                   <a:srgbClr val="E0A458"/>
                 </a:solidFill>
                 <a:latin typeface="Tahoma"/>
+                <a:ea typeface="Tahoma"/>
+                <a:cs typeface="Tahoma"/>
               </a:rPr>
               <a:t>ก่อน – หลังคัดเลือก</a:t>
             </a:r>
@@ -19069,6 +19673,8 @@
                   <a:srgbClr val="0F2038"/>
                 </a:solidFill>
                 <a:latin typeface="Tahoma"/>
+                <a:ea typeface="Tahoma"/>
+                <a:cs typeface="Tahoma"/>
               </a:rPr>
               <a:t>ใช้ feature น้อยลงครึ่งหนึ่ง แต่ผลเท่าเดิมและเทรนเร็วขึ้น</a:t>
             </a:r>
@@ -19155,6 +19761,8 @@
                   <a:srgbClr val="FFFFFF"/>
                 </a:solidFill>
                 <a:latin typeface="Tahoma"/>
+                <a:ea typeface="Tahoma"/>
+                <a:cs typeface="Tahoma"/>
               </a:rPr>
               <a:t>ชุด Feature</a:t>
             </a:r>
@@ -19197,6 +19805,8 @@
                   <a:srgbClr val="FFFFFF"/>
                 </a:solidFill>
                 <a:latin typeface="Tahoma"/>
+                <a:ea typeface="Tahoma"/>
+                <a:cs typeface="Tahoma"/>
               </a:rPr>
               <a:t>จำนวน</a:t>
             </a:r>
@@ -19239,6 +19849,8 @@
                   <a:srgbClr val="FFFFFF"/>
                 </a:solidFill>
                 <a:latin typeface="Tahoma"/>
+                <a:ea typeface="Tahoma"/>
+                <a:cs typeface="Tahoma"/>
               </a:rPr>
               <a:t>F1 (CV)</a:t>
             </a:r>
@@ -19281,6 +19893,8 @@
                   <a:srgbClr val="FFFFFF"/>
                 </a:solidFill>
                 <a:latin typeface="Tahoma"/>
+                <a:ea typeface="Tahoma"/>
+                <a:cs typeface="Tahoma"/>
               </a:rPr>
               <a:t>ROC-AUC</a:t>
             </a:r>
@@ -19323,6 +19937,8 @@
                   <a:srgbClr val="1F2C3D"/>
                 </a:solidFill>
                 <a:latin typeface="Tahoma"/>
+                <a:ea typeface="Tahoma"/>
+                <a:cs typeface="Tahoma"/>
               </a:rPr>
               <a:t>A: ตัวแปรเดิม</a:t>
             </a:r>
@@ -19365,6 +19981,8 @@
                   <a:srgbClr val="1F2C3D"/>
                 </a:solidFill>
                 <a:latin typeface="Tahoma"/>
+                <a:ea typeface="Tahoma"/>
+                <a:cs typeface="Tahoma"/>
               </a:rPr>
               <a:t>28</a:t>
             </a:r>
@@ -19407,6 +20025,8 @@
                   <a:srgbClr val="1F2C3D"/>
                 </a:solidFill>
                 <a:latin typeface="Tahoma"/>
+                <a:ea typeface="Tahoma"/>
+                <a:cs typeface="Tahoma"/>
               </a:rPr>
               <a:t>0.8103 ± 0.0049</a:t>
             </a:r>
@@ -19449,6 +20069,8 @@
                   <a:srgbClr val="1F2C3D"/>
                 </a:solidFill>
                 <a:latin typeface="Tahoma"/>
+                <a:ea typeface="Tahoma"/>
+                <a:cs typeface="Tahoma"/>
               </a:rPr>
               <a:t>0.9420</a:t>
             </a:r>
@@ -19535,6 +20157,8 @@
                   <a:srgbClr val="1F2C3D"/>
                 </a:solidFill>
                 <a:latin typeface="Tahoma"/>
+                <a:ea typeface="Tahoma"/>
+                <a:cs typeface="Tahoma"/>
               </a:rPr>
               <a:t>B: เดิม + ที่สร้างใหม่</a:t>
             </a:r>
@@ -19577,6 +20201,8 @@
                   <a:srgbClr val="1F2C3D"/>
                 </a:solidFill>
                 <a:latin typeface="Tahoma"/>
+                <a:ea typeface="Tahoma"/>
+                <a:cs typeface="Tahoma"/>
               </a:rPr>
               <a:t>37</a:t>
             </a:r>
@@ -19619,6 +20245,8 @@
                   <a:srgbClr val="1F2C3D"/>
                 </a:solidFill>
                 <a:latin typeface="Tahoma"/>
+                <a:ea typeface="Tahoma"/>
+                <a:cs typeface="Tahoma"/>
               </a:rPr>
               <a:t>0.8127 ± 0.0042</a:t>
             </a:r>
@@ -19661,6 +20289,8 @@
                   <a:srgbClr val="1F2C3D"/>
                 </a:solidFill>
                 <a:latin typeface="Tahoma"/>
+                <a:ea typeface="Tahoma"/>
+                <a:cs typeface="Tahoma"/>
               </a:rPr>
               <a:t>0.9428</a:t>
             </a:r>
@@ -19747,6 +20377,8 @@
                   <a:srgbClr val="0F2038"/>
                 </a:solidFill>
                 <a:latin typeface="Tahoma"/>
+                <a:ea typeface="Tahoma"/>
+                <a:cs typeface="Tahoma"/>
               </a:rPr>
               <a:t>C: คัดเลือกแล้ว</a:t>
             </a:r>
@@ -19789,6 +20421,8 @@
                   <a:srgbClr val="0F2038"/>
                 </a:solidFill>
                 <a:latin typeface="Tahoma"/>
+                <a:ea typeface="Tahoma"/>
+                <a:cs typeface="Tahoma"/>
               </a:rPr>
               <a:t>18</a:t>
             </a:r>
@@ -19831,6 +20465,8 @@
                   <a:srgbClr val="0F2038"/>
                 </a:solidFill>
                 <a:latin typeface="Tahoma"/>
+                <a:ea typeface="Tahoma"/>
+                <a:cs typeface="Tahoma"/>
               </a:rPr>
               <a:t>0.8112 ± 0.0027</a:t>
             </a:r>
@@ -19873,6 +20509,8 @@
                   <a:srgbClr val="0F2038"/>
                 </a:solidFill>
                 <a:latin typeface="Tahoma"/>
+                <a:ea typeface="Tahoma"/>
+                <a:cs typeface="Tahoma"/>
               </a:rPr>
               <a:t>0.9417</a:t>
             </a:r>
@@ -19961,6 +20599,8 @@
                   <a:srgbClr val="0F2038"/>
                 </a:solidFill>
                 <a:latin typeface="Tahoma"/>
+                <a:ea typeface="Tahoma"/>
+                <a:cs typeface="Tahoma"/>
               </a:rPr>
               <a:t>ผลต่างระหว่าง B กับ C = 0.0015 </a:t>
             </a:r>
@@ -19970,6 +20610,8 @@
                   <a:srgbClr val="1F2C3D"/>
                 </a:solidFill>
                 <a:latin typeface="Tahoma"/>
+                <a:ea typeface="Tahoma"/>
+                <a:cs typeface="Tahoma"/>
               </a:rPr>
               <a:t>ซึ่งน้อยกว่าค่า std (0.0042)</a:t>
             </a:r>
@@ -19989,6 +20631,8 @@
                   <a:srgbClr val="0F2038"/>
                 </a:solidFill>
                 <a:latin typeface="Tahoma"/>
+                <a:ea typeface="Tahoma"/>
+                <a:cs typeface="Tahoma"/>
               </a:rPr>
               <a:t>→ ถือว่าไม่ต่างกันอย่างมีนัยสำคัญ แต่ C มีความแปรปรวนต่ำที่สุดและเทรนเร็วที่สุด จึงเลือก C</a:t>
             </a:r>
@@ -20055,6 +20699,8 @@
                   <a:srgbClr val="6B7A8C"/>
                 </a:solidFill>
                 <a:latin typeface="Tahoma"/>
+                <a:ea typeface="Tahoma"/>
+                <a:cs typeface="Tahoma"/>
               </a:rPr>
               <a:t>กราฟตอบคำถาม “ทำไมเลือก K = 18” — เพิ่ม feature เกินจุดนี้แล้วคะแนนไม่ขึ้นอีก</a:t>
             </a:r>

--- a/slides/Hotel-Booking-Cancellation-Prediction.pptx
+++ b/slides/Hotel-Booking-Cancellation-Prediction.pptx
@@ -588,7 +588,7 @@
           <a:lstStyle/>
           <a:p>
             <a:r>
-              <a:t>ชี้ให้เห็นว่า Dummy ได้ F1 = 0 ทั้งที่ Accuracy สูง</a:t>
+              <a:t>ชี้ว่า Decision Tree overfit ชัดเจน ส่วน Random Forest แก้ด้วยการรวมหลายต้น</a:t>
             </a:r>
           </a:p>
         </p:txBody>
@@ -5461,8 +5461,8 @@
         </p:blipFill>
         <p:spPr>
           <a:xfrm>
-            <a:off x="6309360" y="1950812"/>
-            <a:ext cx="5303520" cy="2316296"/>
+            <a:off x="6309360" y="1783080"/>
+            <a:ext cx="5303520" cy="2651760"/>
           </a:xfrm>
           <a:prstGeom prst="rect">
             <a:avLst/>
@@ -5684,7 +5684,7 @@
                 <a:ea typeface="Tahoma"/>
                 <a:cs typeface="Tahoma"/>
               </a:rPr>
-              <a:t>Dummy (baseline)</a:t>
+              <a:t>Logistic Regression</a:t>
             </a:r>
           </a:p>
         </p:txBody>
@@ -5728,7 +5728,7 @@
                 <a:ea typeface="Tahoma"/>
                 <a:cs typeface="Tahoma"/>
               </a:rPr>
-              <a:t>0.000</a:t>
+              <a:t>0.763</a:t>
             </a:r>
           </a:p>
         </p:txBody>
@@ -5772,7 +5772,7 @@
                 <a:ea typeface="Tahoma"/>
                 <a:cs typeface="Tahoma"/>
               </a:rPr>
-              <a:t>0.000</a:t>
+              <a:t>0.001</a:t>
             </a:r>
           </a:p>
         </p:txBody>
@@ -5860,7 +5860,7 @@
                 <a:ea typeface="Tahoma"/>
                 <a:cs typeface="Tahoma"/>
               </a:rPr>
-              <a:t>Logistic Regression</a:t>
+              <a:t>Decision Tree</a:t>
             </a:r>
           </a:p>
         </p:txBody>
@@ -5904,7 +5904,7 @@
                 <a:ea typeface="Tahoma"/>
                 <a:cs typeface="Tahoma"/>
               </a:rPr>
-              <a:t>0.763</a:t>
+              <a:t>0.791</a:t>
             </a:r>
           </a:p>
         </p:txBody>
@@ -5940,138 +5940,6 @@
               </a:spcAft>
             </a:pPr>
             <a:r>
-              <a:rPr sz="1300" b="0">
-                <a:solidFill>
-                  <a:srgbClr val="1F2C3D"/>
-                </a:solidFill>
-                <a:latin typeface="Tahoma"/>
-                <a:ea typeface="Tahoma"/>
-                <a:cs typeface="Tahoma"/>
-              </a:rPr>
-              <a:t>0.001</a:t>
-            </a:r>
-          </a:p>
-        </p:txBody>
-      </p:sp>
-      <p:sp>
-        <p:nvSpPr>
-          <p:cNvPr id="18" name="TextBox 17"/>
-          <p:cNvSpPr txBox="1"/>
-          <p:nvPr/>
-        </p:nvSpPr>
-        <p:spPr>
-          <a:xfrm>
-            <a:off x="658368" y="2779776"/>
-            <a:ext cx="2298891" cy="292608"/>
-          </a:xfrm>
-          <a:prstGeom prst="rect">
-            <a:avLst/>
-          </a:prstGeom>
-          <a:noFill/>
-        </p:spPr>
-        <p:txBody>
-          <a:bodyPr wrap="square" lIns="0" rIns="0" tIns="0" bIns="0" anchor="t">
-            <a:spAutoFit/>
-          </a:bodyPr>
-          <a:lstStyle/>
-          <a:p>
-            <a:pPr algn="l">
-              <a:lnSpc>
-                <a:spcPct val="100000"/>
-              </a:lnSpc>
-              <a:spcAft>
-                <a:spcPts val="0"/>
-              </a:spcAft>
-            </a:pPr>
-            <a:r>
-              <a:rPr sz="1300" b="0">
-                <a:solidFill>
-                  <a:srgbClr val="1F2C3D"/>
-                </a:solidFill>
-                <a:latin typeface="Tahoma"/>
-                <a:ea typeface="Tahoma"/>
-                <a:cs typeface="Tahoma"/>
-              </a:rPr>
-              <a:t>Decision Tree</a:t>
-            </a:r>
-          </a:p>
-        </p:txBody>
-      </p:sp>
-      <p:sp>
-        <p:nvSpPr>
-          <p:cNvPr id="19" name="TextBox 18"/>
-          <p:cNvSpPr txBox="1"/>
-          <p:nvPr/>
-        </p:nvSpPr>
-        <p:spPr>
-          <a:xfrm>
-            <a:off x="3176715" y="2779776"/>
-            <a:ext cx="1039717" cy="292608"/>
-          </a:xfrm>
-          <a:prstGeom prst="rect">
-            <a:avLst/>
-          </a:prstGeom>
-          <a:noFill/>
-        </p:spPr>
-        <p:txBody>
-          <a:bodyPr wrap="square" lIns="0" rIns="0" tIns="0" bIns="0" anchor="t">
-            <a:spAutoFit/>
-          </a:bodyPr>
-          <a:lstStyle/>
-          <a:p>
-            <a:pPr algn="ctr">
-              <a:lnSpc>
-                <a:spcPct val="100000"/>
-              </a:lnSpc>
-              <a:spcAft>
-                <a:spcPts val="0"/>
-              </a:spcAft>
-            </a:pPr>
-            <a:r>
-              <a:rPr sz="1300" b="0">
-                <a:solidFill>
-                  <a:srgbClr val="1F2C3D"/>
-                </a:solidFill>
-                <a:latin typeface="Tahoma"/>
-                <a:ea typeface="Tahoma"/>
-                <a:cs typeface="Tahoma"/>
-              </a:rPr>
-              <a:t>0.791</a:t>
-            </a:r>
-          </a:p>
-        </p:txBody>
-      </p:sp>
-      <p:sp>
-        <p:nvSpPr>
-          <p:cNvPr id="20" name="TextBox 19"/>
-          <p:cNvSpPr txBox="1"/>
-          <p:nvPr/>
-        </p:nvSpPr>
-        <p:spPr>
-          <a:xfrm>
-            <a:off x="4435888" y="2779776"/>
-            <a:ext cx="1489422" cy="292608"/>
-          </a:xfrm>
-          <a:prstGeom prst="rect">
-            <a:avLst/>
-          </a:prstGeom>
-          <a:noFill/>
-        </p:spPr>
-        <p:txBody>
-          <a:bodyPr wrap="square" lIns="0" rIns="0" tIns="0" bIns="0" anchor="t">
-            <a:spAutoFit/>
-          </a:bodyPr>
-          <a:lstStyle/>
-          <a:p>
-            <a:pPr algn="ctr">
-              <a:lnSpc>
-                <a:spcPct val="100000"/>
-              </a:lnSpc>
-              <a:spcAft>
-                <a:spcPts val="0"/>
-              </a:spcAft>
-            </a:pPr>
-            <a:r>
               <a:rPr sz="1300" b="1">
                 <a:solidFill>
                   <a:srgbClr val="0F2038"/>
@@ -6087,13 +5955,13 @@
       </p:sp>
       <p:sp>
         <p:nvSpPr>
-          <p:cNvPr id="21" name="Rectangle 20"/>
+          <p:cNvPr id="18" name="Rectangle 17"/>
           <p:cNvSpPr/>
           <p:nvPr/>
         </p:nvSpPr>
         <p:spPr>
           <a:xfrm>
-            <a:off x="548640" y="3090672"/>
+            <a:off x="548640" y="2706624"/>
             <a:ext cx="5486400" cy="384048"/>
           </a:xfrm>
           <a:prstGeom prst="rect">
@@ -6131,13 +5999,13 @@
       </p:sp>
       <p:sp>
         <p:nvSpPr>
-          <p:cNvPr id="22" name="TextBox 21"/>
-          <p:cNvSpPr txBox="1"/>
-          <p:nvPr/>
-        </p:nvSpPr>
-        <p:spPr>
-          <a:xfrm>
-            <a:off x="658368" y="3163824"/>
+          <p:cNvPr id="19" name="TextBox 18"/>
+          <p:cNvSpPr txBox="1"/>
+          <p:nvPr/>
+        </p:nvSpPr>
+        <p:spPr>
+          <a:xfrm>
+            <a:off x="658368" y="2779776"/>
             <a:ext cx="2298891" cy="292608"/>
           </a:xfrm>
           <a:prstGeom prst="rect">
@@ -6175,13 +6043,13 @@
       </p:sp>
       <p:sp>
         <p:nvSpPr>
-          <p:cNvPr id="23" name="TextBox 22"/>
-          <p:cNvSpPr txBox="1"/>
-          <p:nvPr/>
-        </p:nvSpPr>
-        <p:spPr>
-          <a:xfrm>
-            <a:off x="3176715" y="3163824"/>
+          <p:cNvPr id="20" name="TextBox 19"/>
+          <p:cNvSpPr txBox="1"/>
+          <p:nvPr/>
+        </p:nvSpPr>
+        <p:spPr>
+          <a:xfrm>
+            <a:off x="3176715" y="2779776"/>
             <a:ext cx="1039717" cy="292608"/>
           </a:xfrm>
           <a:prstGeom prst="rect">
@@ -6219,13 +6087,13 @@
       </p:sp>
       <p:sp>
         <p:nvSpPr>
-          <p:cNvPr id="24" name="TextBox 23"/>
-          <p:cNvSpPr txBox="1"/>
-          <p:nvPr/>
-        </p:nvSpPr>
-        <p:spPr>
-          <a:xfrm>
-            <a:off x="4435888" y="3163824"/>
+          <p:cNvPr id="21" name="TextBox 20"/>
+          <p:cNvSpPr txBox="1"/>
+          <p:nvPr/>
+        </p:nvSpPr>
+        <p:spPr>
+          <a:xfrm>
+            <a:off x="4435888" y="2779776"/>
             <a:ext cx="1489422" cy="292608"/>
           </a:xfrm>
           <a:prstGeom prst="rect">
@@ -6263,139 +6131,7 @@
       </p:sp>
       <p:sp>
         <p:nvSpPr>
-          <p:cNvPr id="25" name="TextBox 24"/>
-          <p:cNvSpPr txBox="1"/>
-          <p:nvPr/>
-        </p:nvSpPr>
-        <p:spPr>
-          <a:xfrm>
-            <a:off x="658368" y="3547872"/>
-            <a:ext cx="2298891" cy="292608"/>
-          </a:xfrm>
-          <a:prstGeom prst="rect">
-            <a:avLst/>
-          </a:prstGeom>
-          <a:noFill/>
-        </p:spPr>
-        <p:txBody>
-          <a:bodyPr wrap="square" lIns="0" rIns="0" tIns="0" bIns="0" anchor="t">
-            <a:spAutoFit/>
-          </a:bodyPr>
-          <a:lstStyle/>
-          <a:p>
-            <a:pPr algn="l">
-              <a:lnSpc>
-                <a:spcPct val="100000"/>
-              </a:lnSpc>
-              <a:spcAft>
-                <a:spcPts val="0"/>
-              </a:spcAft>
-            </a:pPr>
-            <a:r>
-              <a:rPr sz="1300" b="0">
-                <a:solidFill>
-                  <a:srgbClr val="1F2C3D"/>
-                </a:solidFill>
-                <a:latin typeface="Tahoma"/>
-                <a:ea typeface="Tahoma"/>
-                <a:cs typeface="Tahoma"/>
-              </a:rPr>
-              <a:t>HistGradientBoosting</a:t>
-            </a:r>
-          </a:p>
-        </p:txBody>
-      </p:sp>
-      <p:sp>
-        <p:nvSpPr>
-          <p:cNvPr id="26" name="TextBox 25"/>
-          <p:cNvSpPr txBox="1"/>
-          <p:nvPr/>
-        </p:nvSpPr>
-        <p:spPr>
-          <a:xfrm>
-            <a:off x="3176715" y="3547872"/>
-            <a:ext cx="1039717" cy="292608"/>
-          </a:xfrm>
-          <a:prstGeom prst="rect">
-            <a:avLst/>
-          </a:prstGeom>
-          <a:noFill/>
-        </p:spPr>
-        <p:txBody>
-          <a:bodyPr wrap="square" lIns="0" rIns="0" tIns="0" bIns="0" anchor="t">
-            <a:spAutoFit/>
-          </a:bodyPr>
-          <a:lstStyle/>
-          <a:p>
-            <a:pPr algn="ctr">
-              <a:lnSpc>
-                <a:spcPct val="100000"/>
-              </a:lnSpc>
-              <a:spcAft>
-                <a:spcPts val="0"/>
-              </a:spcAft>
-            </a:pPr>
-            <a:r>
-              <a:rPr sz="1300" b="0">
-                <a:solidFill>
-                  <a:srgbClr val="1F2C3D"/>
-                </a:solidFill>
-                <a:latin typeface="Tahoma"/>
-                <a:ea typeface="Tahoma"/>
-                <a:cs typeface="Tahoma"/>
-              </a:rPr>
-              <a:t>0.811</a:t>
-            </a:r>
-          </a:p>
-        </p:txBody>
-      </p:sp>
-      <p:sp>
-        <p:nvSpPr>
-          <p:cNvPr id="27" name="TextBox 26"/>
-          <p:cNvSpPr txBox="1"/>
-          <p:nvPr/>
-        </p:nvSpPr>
-        <p:spPr>
-          <a:xfrm>
-            <a:off x="4435888" y="3547872"/>
-            <a:ext cx="1489422" cy="292608"/>
-          </a:xfrm>
-          <a:prstGeom prst="rect">
-            <a:avLst/>
-          </a:prstGeom>
-          <a:noFill/>
-        </p:spPr>
-        <p:txBody>
-          <a:bodyPr wrap="square" lIns="0" rIns="0" tIns="0" bIns="0" anchor="t">
-            <a:spAutoFit/>
-          </a:bodyPr>
-          <a:lstStyle/>
-          <a:p>
-            <a:pPr algn="ctr">
-              <a:lnSpc>
-                <a:spcPct val="100000"/>
-              </a:lnSpc>
-              <a:spcAft>
-                <a:spcPts val="0"/>
-              </a:spcAft>
-            </a:pPr>
-            <a:r>
-              <a:rPr sz="1300" b="0">
-                <a:solidFill>
-                  <a:srgbClr val="1F2C3D"/>
-                </a:solidFill>
-                <a:latin typeface="Tahoma"/>
-                <a:ea typeface="Tahoma"/>
-                <a:cs typeface="Tahoma"/>
-              </a:rPr>
-              <a:t>0.011</a:t>
-            </a:r>
-          </a:p>
-        </p:txBody>
-      </p:sp>
-      <p:sp>
-        <p:nvSpPr>
-          <p:cNvPr id="28" name="Rounded Rectangle 27"/>
+          <p:cNvPr id="22" name="Rounded Rectangle 21"/>
           <p:cNvSpPr/>
           <p:nvPr/>
         </p:nvSpPr>
@@ -6441,7 +6177,7 @@
       </p:sp>
       <p:sp>
         <p:nvSpPr>
-          <p:cNvPr id="29" name="TextBox 28"/>
+          <p:cNvPr id="23" name="TextBox 22"/>
           <p:cNvSpPr txBox="1"/>
           <p:nvPr/>
         </p:nvSpPr>
@@ -6517,7 +6253,7 @@
       </p:sp>
       <p:sp>
         <p:nvSpPr>
-          <p:cNvPr id="30" name="TextBox 29"/>
+          <p:cNvPr id="24" name="TextBox 23"/>
           <p:cNvSpPr txBox="1"/>
           <p:nvPr/>
         </p:nvSpPr>
@@ -6759,7 +6495,7 @@
                 <a:ea typeface="Tahoma"/>
                 <a:cs typeface="Tahoma"/>
               </a:rPr>
-              <a:t>Accuracy หลอกตา — Dummy ได้ 62.9% แต่ F1 = 0</a:t>
+              <a:t>Accuracy หลอกตา — ทายว่า "ไม่ยกเลิก" ทุกรายการก็ได้ 62.9%</a:t>
             </a:r>
           </a:p>
         </p:txBody>
@@ -7648,7 +7384,7 @@
                 <a:ea typeface="Tahoma"/>
                 <a:cs typeface="Tahoma"/>
               </a:rPr>
-              <a:t>Baseline: Dummy Classifier ทายคลาสที่พบบ่อยที่สุดเสมอ ได้ Accuracy 62.9% แต่ F1 = 0 คือจับคนที่จะยกเลิกไม่ได้เลยแม้แต่รายเดียว</a:t>
+              <a:t>เกณฑ์ขั้นต่ำ: การทายว่า "ไม่ยกเลิก" ทุกรายการได้ Accuracy 62.9% แต่ F1 = 0 คือจับคนที่จะยกเลิกไม่ได้เลยแม้แต่รายเดียว โมเดลจึงต้องชนะเกณฑ์นี้ให้ได้</a:t>
             </a:r>
           </a:p>
         </p:txBody>
@@ -8476,183 +8212,7 @@
       </p:sp>
       <p:sp>
         <p:nvSpPr>
-          <p:cNvPr id="20" name="TextBox 19"/>
-          <p:cNvSpPr txBox="1"/>
-          <p:nvPr/>
-        </p:nvSpPr>
-        <p:spPr>
-          <a:xfrm>
-            <a:off x="658368" y="2889504"/>
-            <a:ext cx="2093728" cy="329184"/>
-          </a:xfrm>
-          <a:prstGeom prst="rect">
-            <a:avLst/>
-          </a:prstGeom>
-          <a:noFill/>
-        </p:spPr>
-        <p:txBody>
-          <a:bodyPr wrap="square" lIns="0" rIns="0" tIns="0" bIns="0" anchor="t">
-            <a:spAutoFit/>
-          </a:bodyPr>
-          <a:lstStyle/>
-          <a:p>
-            <a:pPr algn="l">
-              <a:lnSpc>
-                <a:spcPct val="100000"/>
-              </a:lnSpc>
-              <a:spcAft>
-                <a:spcPts val="0"/>
-              </a:spcAft>
-            </a:pPr>
-            <a:r>
-              <a:rPr sz="1300" b="0">
-                <a:solidFill>
-                  <a:srgbClr val="1F2C3D"/>
-                </a:solidFill>
-                <a:latin typeface="Tahoma"/>
-                <a:ea typeface="Tahoma"/>
-                <a:cs typeface="Tahoma"/>
-              </a:rPr>
-              <a:t>HistGradientBoosting</a:t>
-            </a:r>
-          </a:p>
-        </p:txBody>
-      </p:sp>
-      <p:sp>
-        <p:nvSpPr>
-          <p:cNvPr id="21" name="TextBox 20"/>
-          <p:cNvSpPr txBox="1"/>
-          <p:nvPr/>
-        </p:nvSpPr>
-        <p:spPr>
-          <a:xfrm>
-            <a:off x="2971552" y="2889504"/>
-            <a:ext cx="937136" cy="329184"/>
-          </a:xfrm>
-          <a:prstGeom prst="rect">
-            <a:avLst/>
-          </a:prstGeom>
-          <a:noFill/>
-        </p:spPr>
-        <p:txBody>
-          <a:bodyPr wrap="square" lIns="0" rIns="0" tIns="0" bIns="0" anchor="t">
-            <a:spAutoFit/>
-          </a:bodyPr>
-          <a:lstStyle/>
-          <a:p>
-            <a:pPr algn="ctr">
-              <a:lnSpc>
-                <a:spcPct val="100000"/>
-              </a:lnSpc>
-              <a:spcAft>
-                <a:spcPts val="0"/>
-              </a:spcAft>
-            </a:pPr>
-            <a:r>
-              <a:rPr sz="1300" b="0">
-                <a:solidFill>
-                  <a:srgbClr val="1F2C3D"/>
-                </a:solidFill>
-                <a:latin typeface="Tahoma"/>
-                <a:ea typeface="Tahoma"/>
-                <a:cs typeface="Tahoma"/>
-              </a:rPr>
-              <a:t>0.8112</a:t>
-            </a:r>
-          </a:p>
-        </p:txBody>
-      </p:sp>
-      <p:sp>
-        <p:nvSpPr>
-          <p:cNvPr id="22" name="TextBox 21"/>
-          <p:cNvSpPr txBox="1"/>
-          <p:nvPr/>
-        </p:nvSpPr>
-        <p:spPr>
-          <a:xfrm>
-            <a:off x="4128144" y="2889504"/>
-            <a:ext cx="937136" cy="329184"/>
-          </a:xfrm>
-          <a:prstGeom prst="rect">
-            <a:avLst/>
-          </a:prstGeom>
-          <a:noFill/>
-        </p:spPr>
-        <p:txBody>
-          <a:bodyPr wrap="square" lIns="0" rIns="0" tIns="0" bIns="0" anchor="t">
-            <a:spAutoFit/>
-          </a:bodyPr>
-          <a:lstStyle/>
-          <a:p>
-            <a:pPr algn="ctr">
-              <a:lnSpc>
-                <a:spcPct val="100000"/>
-              </a:lnSpc>
-              <a:spcAft>
-                <a:spcPts val="0"/>
-              </a:spcAft>
-            </a:pPr>
-            <a:r>
-              <a:rPr sz="1300" b="1">
-                <a:solidFill>
-                  <a:srgbClr val="0F2038"/>
-                </a:solidFill>
-                <a:latin typeface="Tahoma"/>
-                <a:ea typeface="Tahoma"/>
-                <a:cs typeface="Tahoma"/>
-              </a:rPr>
-              <a:t>0.8344</a:t>
-            </a:r>
-          </a:p>
-        </p:txBody>
-      </p:sp>
-      <p:sp>
-        <p:nvSpPr>
-          <p:cNvPr id="23" name="TextBox 22"/>
-          <p:cNvSpPr txBox="1"/>
-          <p:nvPr/>
-        </p:nvSpPr>
-        <p:spPr>
-          <a:xfrm>
-            <a:off x="5284736" y="2889504"/>
-            <a:ext cx="1737854" cy="329184"/>
-          </a:xfrm>
-          <a:prstGeom prst="rect">
-            <a:avLst/>
-          </a:prstGeom>
-          <a:noFill/>
-        </p:spPr>
-        <p:txBody>
-          <a:bodyPr wrap="square" lIns="0" rIns="0" tIns="0" bIns="0" anchor="t">
-            <a:spAutoFit/>
-          </a:bodyPr>
-          <a:lstStyle/>
-          <a:p>
-            <a:pPr algn="ctr">
-              <a:lnSpc>
-                <a:spcPct val="100000"/>
-              </a:lnSpc>
-              <a:spcAft>
-                <a:spcPts val="0"/>
-              </a:spcAft>
-            </a:pPr>
-            <a:r>
-              <a:rPr sz="1300" b="0">
-                <a:solidFill>
-                  <a:srgbClr val="1F2C3D"/>
-                </a:solidFill>
-                <a:latin typeface="Tahoma"/>
-                <a:ea typeface="Tahoma"/>
-                <a:cs typeface="Tahoma"/>
-              </a:rPr>
-              <a:t>0.011 → 0.062</a:t>
-            </a:r>
-          </a:p>
-        </p:txBody>
-      </p:sp>
-      <p:sp>
-        <p:nvSpPr>
-          <p:cNvPr id="24" name="Rounded Rectangle 23"/>
+          <p:cNvPr id="20" name="Rounded Rectangle 19"/>
           <p:cNvSpPr/>
           <p:nvPr/>
         </p:nvSpPr>
@@ -8698,7 +8258,7 @@
       </p:sp>
       <p:sp>
         <p:nvSpPr>
-          <p:cNvPr id="25" name="TextBox 24"/>
+          <p:cNvPr id="21" name="TextBox 20"/>
           <p:cNvSpPr txBox="1"/>
           <p:nvPr/>
         </p:nvSpPr>
@@ -8774,7 +8334,7 @@
       </p:sp>
       <p:sp>
         <p:nvSpPr>
-          <p:cNvPr id="26" name="TextBox 25"/>
+          <p:cNvPr id="22" name="TextBox 21"/>
           <p:cNvSpPr txBox="1"/>
           <p:nvPr/>
         </p:nvSpPr>
@@ -8839,7 +8399,7 @@
       </p:sp>
       <p:pic>
         <p:nvPicPr>
-          <p:cNvPr id="27" name="Picture 26" descr="7_validation_curve_rf_max_depth.png"/>
+          <p:cNvPr id="23" name="Picture 22" descr="7_validation_curve_rf_max_depth.png"/>
           <p:cNvPicPr>
             <a:picLocks noChangeAspect="1"/>
           </p:cNvPicPr>
@@ -8863,7 +8423,7 @@
       </p:pic>
       <p:sp>
         <p:nvSpPr>
-          <p:cNvPr id="28" name="TextBox 27"/>
+          <p:cNvPr id="24" name="TextBox 23"/>
           <p:cNvSpPr txBox="1"/>
           <p:nvPr/>
         </p:nvSpPr>
@@ -11525,7 +11085,7 @@
                 <a:ea typeface="Tahoma"/>
                 <a:cs typeface="Tahoma"/>
               </a:rPr>
-              <a:t>99.8%</a:t>
+              <a:t>100%</a:t>
             </a:r>
           </a:p>
         </p:txBody>
@@ -11704,7 +11264,7 @@
                 <a:ea typeface="Tahoma"/>
                 <a:cs typeface="Tahoma"/>
               </a:rPr>
-              <a:t>25.9%</a:t>
+              <a:t>33.3%</a:t>
             </a:r>
           </a:p>
         </p:txBody>
@@ -11883,7 +11443,7 @@
                 <a:ea typeface="Tahoma"/>
                 <a:cs typeface="Tahoma"/>
               </a:rPr>
-              <a:t>1.0%</a:t>
+              <a:t>0.6%</a:t>
             </a:r>
           </a:p>
         </p:txBody>
@@ -12083,7 +11643,7 @@
                 <a:ea typeface="Tahoma"/>
                 <a:cs typeface="Tahoma"/>
               </a:rPr>
-              <a:t>โมเดลบนเว็บใช้ HistGradientBoosting ขนาด 0.8 MB (F1 0.8334) แทน Random Forest 356.8 MB เพราะข้อจำกัดด้านหน่วยความจำของบริการฟรี · ผลทำนายอิงข้อมูลโปรตุเกสปี 2015–2017</a:t>
+              <a:t>โมเดลบนเว็บเป็น Random Forest ฉบับย่อ 28.8 MB (F1 0.8376) แทนตัวเต็ม 356.8 MB เพราะข้อจำกัดด้านหน่วยความจำของบริการฟรี · ผลทำนายอิงข้อมูลโปรตุเกสปี 2015–2017</a:t>
             </a:r>
           </a:p>
         </p:txBody>
@@ -20028,7 +19588,7 @@
                 <a:ea typeface="Tahoma"/>
                 <a:cs typeface="Tahoma"/>
               </a:rPr>
-              <a:t>0.8103 ± 0.0049</a:t>
+              <a:t>0.8416 ± 0.0037</a:t>
             </a:r>
           </a:p>
         </p:txBody>
@@ -20072,7 +19632,7 @@
                 <a:ea typeface="Tahoma"/>
                 <a:cs typeface="Tahoma"/>
               </a:rPr>
-              <a:t>0.9420</a:t>
+              <a:t>0.9551</a:t>
             </a:r>
           </a:p>
         </p:txBody>
@@ -20248,7 +19808,7 @@
                 <a:ea typeface="Tahoma"/>
                 <a:cs typeface="Tahoma"/>
               </a:rPr>
-              <a:t>0.8127 ± 0.0042</a:t>
+              <a:t>0.8427 ± 0.0028</a:t>
             </a:r>
           </a:p>
         </p:txBody>
@@ -20292,7 +19852,7 @@
                 <a:ea typeface="Tahoma"/>
                 <a:cs typeface="Tahoma"/>
               </a:rPr>
-              <a:t>0.9428</a:t>
+              <a:t>0.9554</a:t>
             </a:r>
           </a:p>
         </p:txBody>
@@ -20468,7 +20028,7 @@
                 <a:ea typeface="Tahoma"/>
                 <a:cs typeface="Tahoma"/>
               </a:rPr>
-              <a:t>0.8112 ± 0.0027</a:t>
+              <a:t>0.8421 ± 0.0036</a:t>
             </a:r>
           </a:p>
         </p:txBody>
@@ -20512,7 +20072,7 @@
                 <a:ea typeface="Tahoma"/>
                 <a:cs typeface="Tahoma"/>
               </a:rPr>
-              <a:t>0.9417</a:t>
+              <a:t>0.9546</a:t>
             </a:r>
           </a:p>
         </p:txBody>
@@ -20602,7 +20162,7 @@
                 <a:ea typeface="Tahoma"/>
                 <a:cs typeface="Tahoma"/>
               </a:rPr>
-              <a:t>ผลต่างระหว่าง B กับ C = 0.0015 </a:t>
+              <a:t>ผลต่างระหว่าง B กับ C = 0.0006 </a:t>
             </a:r>
             <a:r>
               <a:rPr sz="1400" b="0">
@@ -20613,7 +20173,7 @@
                 <a:ea typeface="Tahoma"/>
                 <a:cs typeface="Tahoma"/>
               </a:rPr>
-              <a:t>ซึ่งน้อยกว่าค่า std (0.0042)</a:t>
+              <a:t>ซึ่งน้อยกว่าค่า std (0.0028)</a:t>
             </a:r>
           </a:p>
           <a:p>
@@ -20634,7 +20194,7 @@
                 <a:ea typeface="Tahoma"/>
                 <a:cs typeface="Tahoma"/>
               </a:rPr>
-              <a:t>→ ถือว่าไม่ต่างกันอย่างมีนัยสำคัญ แต่ C มีความแปรปรวนต่ำที่สุดและเทรนเร็วที่สุด จึงเลือก C</a:t>
+              <a:t>→ ไม่ต่างกันอย่างมีนัยสำคัญ แต่ C ใช้ feature ครึ่งเดียวและเทรนเร็วขึ้นเท่าตัว (8.7 vs 17.5 วินาที)</a:t>
             </a:r>
           </a:p>
         </p:txBody>
@@ -20655,8 +20215,8 @@
         </p:blipFill>
         <p:spPr>
           <a:xfrm>
-            <a:off x="7589520" y="2010029"/>
-            <a:ext cx="4023360" cy="2197862"/>
+            <a:off x="7589520" y="1991360"/>
+            <a:ext cx="4023360" cy="2235200"/>
           </a:xfrm>
           <a:prstGeom prst="rect">
             <a:avLst/>

--- a/slides/Hotel-Booking-Cancellation-Prediction.pptx
+++ b/slides/Hotel-Booking-Cancellation-Prediction.pptx
@@ -588,7 +588,7 @@
           <a:lstStyle/>
           <a:p>
             <a:r>
-              <a:t>ชี้ว่า Decision Tree overfit ชัดเจน ส่วน Random Forest แก้ด้วยการรวมหลายต้น</a:t>
+              <a:t>ชี้ให้เห็นว่า Dummy ได้ F1 = 0 ทั้งที่ Accuracy สูง</a:t>
             </a:r>
           </a:p>
         </p:txBody>
@@ -5461,8 +5461,8 @@
         </p:blipFill>
         <p:spPr>
           <a:xfrm>
-            <a:off x="6309360" y="1783080"/>
-            <a:ext cx="5303520" cy="2651760"/>
+            <a:off x="6309360" y="1950812"/>
+            <a:ext cx="5303520" cy="2316296"/>
           </a:xfrm>
           <a:prstGeom prst="rect">
             <a:avLst/>
@@ -5684,7 +5684,7 @@
                 <a:ea typeface="Tahoma"/>
                 <a:cs typeface="Tahoma"/>
               </a:rPr>
-              <a:t>Logistic Regression</a:t>
+              <a:t>Dummy (baseline)</a:t>
             </a:r>
           </a:p>
         </p:txBody>
@@ -5728,7 +5728,7 @@
                 <a:ea typeface="Tahoma"/>
                 <a:cs typeface="Tahoma"/>
               </a:rPr>
-              <a:t>0.763</a:t>
+              <a:t>0.000</a:t>
             </a:r>
           </a:p>
         </p:txBody>
@@ -5772,7 +5772,7 @@
                 <a:ea typeface="Tahoma"/>
                 <a:cs typeface="Tahoma"/>
               </a:rPr>
-              <a:t>0.001</a:t>
+              <a:t>0.000</a:t>
             </a:r>
           </a:p>
         </p:txBody>
@@ -5860,7 +5860,7 @@
                 <a:ea typeface="Tahoma"/>
                 <a:cs typeface="Tahoma"/>
               </a:rPr>
-              <a:t>Decision Tree</a:t>
+              <a:t>Logistic Regression</a:t>
             </a:r>
           </a:p>
         </p:txBody>
@@ -5904,7 +5904,7 @@
                 <a:ea typeface="Tahoma"/>
                 <a:cs typeface="Tahoma"/>
               </a:rPr>
-              <a:t>0.791</a:t>
+              <a:t>0.763</a:t>
             </a:r>
           </a:p>
         </p:txBody>
@@ -5940,6 +5940,138 @@
               </a:spcAft>
             </a:pPr>
             <a:r>
+              <a:rPr sz="1300" b="0">
+                <a:solidFill>
+                  <a:srgbClr val="1F2C3D"/>
+                </a:solidFill>
+                <a:latin typeface="Tahoma"/>
+                <a:ea typeface="Tahoma"/>
+                <a:cs typeface="Tahoma"/>
+              </a:rPr>
+              <a:t>0.001</a:t>
+            </a:r>
+          </a:p>
+        </p:txBody>
+      </p:sp>
+      <p:sp>
+        <p:nvSpPr>
+          <p:cNvPr id="18" name="TextBox 17"/>
+          <p:cNvSpPr txBox="1"/>
+          <p:nvPr/>
+        </p:nvSpPr>
+        <p:spPr>
+          <a:xfrm>
+            <a:off x="658368" y="2779776"/>
+            <a:ext cx="2298891" cy="292608"/>
+          </a:xfrm>
+          <a:prstGeom prst="rect">
+            <a:avLst/>
+          </a:prstGeom>
+          <a:noFill/>
+        </p:spPr>
+        <p:txBody>
+          <a:bodyPr wrap="square" lIns="0" rIns="0" tIns="0" bIns="0" anchor="t">
+            <a:spAutoFit/>
+          </a:bodyPr>
+          <a:lstStyle/>
+          <a:p>
+            <a:pPr algn="l">
+              <a:lnSpc>
+                <a:spcPct val="100000"/>
+              </a:lnSpc>
+              <a:spcAft>
+                <a:spcPts val="0"/>
+              </a:spcAft>
+            </a:pPr>
+            <a:r>
+              <a:rPr sz="1300" b="0">
+                <a:solidFill>
+                  <a:srgbClr val="1F2C3D"/>
+                </a:solidFill>
+                <a:latin typeface="Tahoma"/>
+                <a:ea typeface="Tahoma"/>
+                <a:cs typeface="Tahoma"/>
+              </a:rPr>
+              <a:t>Decision Tree</a:t>
+            </a:r>
+          </a:p>
+        </p:txBody>
+      </p:sp>
+      <p:sp>
+        <p:nvSpPr>
+          <p:cNvPr id="19" name="TextBox 18"/>
+          <p:cNvSpPr txBox="1"/>
+          <p:nvPr/>
+        </p:nvSpPr>
+        <p:spPr>
+          <a:xfrm>
+            <a:off x="3176715" y="2779776"/>
+            <a:ext cx="1039717" cy="292608"/>
+          </a:xfrm>
+          <a:prstGeom prst="rect">
+            <a:avLst/>
+          </a:prstGeom>
+          <a:noFill/>
+        </p:spPr>
+        <p:txBody>
+          <a:bodyPr wrap="square" lIns="0" rIns="0" tIns="0" bIns="0" anchor="t">
+            <a:spAutoFit/>
+          </a:bodyPr>
+          <a:lstStyle/>
+          <a:p>
+            <a:pPr algn="ctr">
+              <a:lnSpc>
+                <a:spcPct val="100000"/>
+              </a:lnSpc>
+              <a:spcAft>
+                <a:spcPts val="0"/>
+              </a:spcAft>
+            </a:pPr>
+            <a:r>
+              <a:rPr sz="1300" b="0">
+                <a:solidFill>
+                  <a:srgbClr val="1F2C3D"/>
+                </a:solidFill>
+                <a:latin typeface="Tahoma"/>
+                <a:ea typeface="Tahoma"/>
+                <a:cs typeface="Tahoma"/>
+              </a:rPr>
+              <a:t>0.791</a:t>
+            </a:r>
+          </a:p>
+        </p:txBody>
+      </p:sp>
+      <p:sp>
+        <p:nvSpPr>
+          <p:cNvPr id="20" name="TextBox 19"/>
+          <p:cNvSpPr txBox="1"/>
+          <p:nvPr/>
+        </p:nvSpPr>
+        <p:spPr>
+          <a:xfrm>
+            <a:off x="4435888" y="2779776"/>
+            <a:ext cx="1489422" cy="292608"/>
+          </a:xfrm>
+          <a:prstGeom prst="rect">
+            <a:avLst/>
+          </a:prstGeom>
+          <a:noFill/>
+        </p:spPr>
+        <p:txBody>
+          <a:bodyPr wrap="square" lIns="0" rIns="0" tIns="0" bIns="0" anchor="t">
+            <a:spAutoFit/>
+          </a:bodyPr>
+          <a:lstStyle/>
+          <a:p>
+            <a:pPr algn="ctr">
+              <a:lnSpc>
+                <a:spcPct val="100000"/>
+              </a:lnSpc>
+              <a:spcAft>
+                <a:spcPts val="0"/>
+              </a:spcAft>
+            </a:pPr>
+            <a:r>
               <a:rPr sz="1300" b="1">
                 <a:solidFill>
                   <a:srgbClr val="0F2038"/>
@@ -5955,13 +6087,13 @@
       </p:sp>
       <p:sp>
         <p:nvSpPr>
-          <p:cNvPr id="18" name="Rectangle 17"/>
+          <p:cNvPr id="21" name="Rectangle 20"/>
           <p:cNvSpPr/>
           <p:nvPr/>
         </p:nvSpPr>
         <p:spPr>
           <a:xfrm>
-            <a:off x="548640" y="2706624"/>
+            <a:off x="548640" y="3090672"/>
             <a:ext cx="5486400" cy="384048"/>
           </a:xfrm>
           <a:prstGeom prst="rect">
@@ -5999,13 +6131,13 @@
       </p:sp>
       <p:sp>
         <p:nvSpPr>
-          <p:cNvPr id="19" name="TextBox 18"/>
-          <p:cNvSpPr txBox="1"/>
-          <p:nvPr/>
-        </p:nvSpPr>
-        <p:spPr>
-          <a:xfrm>
-            <a:off x="658368" y="2779776"/>
+          <p:cNvPr id="22" name="TextBox 21"/>
+          <p:cNvSpPr txBox="1"/>
+          <p:nvPr/>
+        </p:nvSpPr>
+        <p:spPr>
+          <a:xfrm>
+            <a:off x="658368" y="3163824"/>
             <a:ext cx="2298891" cy="292608"/>
           </a:xfrm>
           <a:prstGeom prst="rect">
@@ -6043,13 +6175,13 @@
       </p:sp>
       <p:sp>
         <p:nvSpPr>
-          <p:cNvPr id="20" name="TextBox 19"/>
-          <p:cNvSpPr txBox="1"/>
-          <p:nvPr/>
-        </p:nvSpPr>
-        <p:spPr>
-          <a:xfrm>
-            <a:off x="3176715" y="2779776"/>
+          <p:cNvPr id="23" name="TextBox 22"/>
+          <p:cNvSpPr txBox="1"/>
+          <p:nvPr/>
+        </p:nvSpPr>
+        <p:spPr>
+          <a:xfrm>
+            <a:off x="3176715" y="3163824"/>
             <a:ext cx="1039717" cy="292608"/>
           </a:xfrm>
           <a:prstGeom prst="rect">
@@ -6087,13 +6219,13 @@
       </p:sp>
       <p:sp>
         <p:nvSpPr>
-          <p:cNvPr id="21" name="TextBox 20"/>
-          <p:cNvSpPr txBox="1"/>
-          <p:nvPr/>
-        </p:nvSpPr>
-        <p:spPr>
-          <a:xfrm>
-            <a:off x="4435888" y="2779776"/>
+          <p:cNvPr id="24" name="TextBox 23"/>
+          <p:cNvSpPr txBox="1"/>
+          <p:nvPr/>
+        </p:nvSpPr>
+        <p:spPr>
+          <a:xfrm>
+            <a:off x="4435888" y="3163824"/>
             <a:ext cx="1489422" cy="292608"/>
           </a:xfrm>
           <a:prstGeom prst="rect">
@@ -6131,7 +6263,139 @@
       </p:sp>
       <p:sp>
         <p:nvSpPr>
-          <p:cNvPr id="22" name="Rounded Rectangle 21"/>
+          <p:cNvPr id="25" name="TextBox 24"/>
+          <p:cNvSpPr txBox="1"/>
+          <p:nvPr/>
+        </p:nvSpPr>
+        <p:spPr>
+          <a:xfrm>
+            <a:off x="658368" y="3547872"/>
+            <a:ext cx="2298891" cy="292608"/>
+          </a:xfrm>
+          <a:prstGeom prst="rect">
+            <a:avLst/>
+          </a:prstGeom>
+          <a:noFill/>
+        </p:spPr>
+        <p:txBody>
+          <a:bodyPr wrap="square" lIns="0" rIns="0" tIns="0" bIns="0" anchor="t">
+            <a:spAutoFit/>
+          </a:bodyPr>
+          <a:lstStyle/>
+          <a:p>
+            <a:pPr algn="l">
+              <a:lnSpc>
+                <a:spcPct val="100000"/>
+              </a:lnSpc>
+              <a:spcAft>
+                <a:spcPts val="0"/>
+              </a:spcAft>
+            </a:pPr>
+            <a:r>
+              <a:rPr sz="1300" b="0">
+                <a:solidFill>
+                  <a:srgbClr val="1F2C3D"/>
+                </a:solidFill>
+                <a:latin typeface="Tahoma"/>
+                <a:ea typeface="Tahoma"/>
+                <a:cs typeface="Tahoma"/>
+              </a:rPr>
+              <a:t>HistGradientBoosting</a:t>
+            </a:r>
+          </a:p>
+        </p:txBody>
+      </p:sp>
+      <p:sp>
+        <p:nvSpPr>
+          <p:cNvPr id="26" name="TextBox 25"/>
+          <p:cNvSpPr txBox="1"/>
+          <p:nvPr/>
+        </p:nvSpPr>
+        <p:spPr>
+          <a:xfrm>
+            <a:off x="3176715" y="3547872"/>
+            <a:ext cx="1039717" cy="292608"/>
+          </a:xfrm>
+          <a:prstGeom prst="rect">
+            <a:avLst/>
+          </a:prstGeom>
+          <a:noFill/>
+        </p:spPr>
+        <p:txBody>
+          <a:bodyPr wrap="square" lIns="0" rIns="0" tIns="0" bIns="0" anchor="t">
+            <a:spAutoFit/>
+          </a:bodyPr>
+          <a:lstStyle/>
+          <a:p>
+            <a:pPr algn="ctr">
+              <a:lnSpc>
+                <a:spcPct val="100000"/>
+              </a:lnSpc>
+              <a:spcAft>
+                <a:spcPts val="0"/>
+              </a:spcAft>
+            </a:pPr>
+            <a:r>
+              <a:rPr sz="1300" b="0">
+                <a:solidFill>
+                  <a:srgbClr val="1F2C3D"/>
+                </a:solidFill>
+                <a:latin typeface="Tahoma"/>
+                <a:ea typeface="Tahoma"/>
+                <a:cs typeface="Tahoma"/>
+              </a:rPr>
+              <a:t>0.811</a:t>
+            </a:r>
+          </a:p>
+        </p:txBody>
+      </p:sp>
+      <p:sp>
+        <p:nvSpPr>
+          <p:cNvPr id="27" name="TextBox 26"/>
+          <p:cNvSpPr txBox="1"/>
+          <p:nvPr/>
+        </p:nvSpPr>
+        <p:spPr>
+          <a:xfrm>
+            <a:off x="4435888" y="3547872"/>
+            <a:ext cx="1489422" cy="292608"/>
+          </a:xfrm>
+          <a:prstGeom prst="rect">
+            <a:avLst/>
+          </a:prstGeom>
+          <a:noFill/>
+        </p:spPr>
+        <p:txBody>
+          <a:bodyPr wrap="square" lIns="0" rIns="0" tIns="0" bIns="0" anchor="t">
+            <a:spAutoFit/>
+          </a:bodyPr>
+          <a:lstStyle/>
+          <a:p>
+            <a:pPr algn="ctr">
+              <a:lnSpc>
+                <a:spcPct val="100000"/>
+              </a:lnSpc>
+              <a:spcAft>
+                <a:spcPts val="0"/>
+              </a:spcAft>
+            </a:pPr>
+            <a:r>
+              <a:rPr sz="1300" b="0">
+                <a:solidFill>
+                  <a:srgbClr val="1F2C3D"/>
+                </a:solidFill>
+                <a:latin typeface="Tahoma"/>
+                <a:ea typeface="Tahoma"/>
+                <a:cs typeface="Tahoma"/>
+              </a:rPr>
+              <a:t>0.011</a:t>
+            </a:r>
+          </a:p>
+        </p:txBody>
+      </p:sp>
+      <p:sp>
+        <p:nvSpPr>
+          <p:cNvPr id="28" name="Rounded Rectangle 27"/>
           <p:cNvSpPr/>
           <p:nvPr/>
         </p:nvSpPr>
@@ -6177,7 +6441,7 @@
       </p:sp>
       <p:sp>
         <p:nvSpPr>
-          <p:cNvPr id="23" name="TextBox 22"/>
+          <p:cNvPr id="29" name="TextBox 28"/>
           <p:cNvSpPr txBox="1"/>
           <p:nvPr/>
         </p:nvSpPr>
@@ -6253,7 +6517,7 @@
       </p:sp>
       <p:sp>
         <p:nvSpPr>
-          <p:cNvPr id="24" name="TextBox 23"/>
+          <p:cNvPr id="30" name="TextBox 29"/>
           <p:cNvSpPr txBox="1"/>
           <p:nvPr/>
         </p:nvSpPr>
@@ -6495,7 +6759,7 @@
                 <a:ea typeface="Tahoma"/>
                 <a:cs typeface="Tahoma"/>
               </a:rPr>
-              <a:t>Accuracy หลอกตา — ทายว่า "ไม่ยกเลิก" ทุกรายการก็ได้ 62.9%</a:t>
+              <a:t>Accuracy หลอกตา — Dummy ได้ 62.9% แต่ F1 = 0</a:t>
             </a:r>
           </a:p>
         </p:txBody>
@@ -7384,7 +7648,7 @@
                 <a:ea typeface="Tahoma"/>
                 <a:cs typeface="Tahoma"/>
               </a:rPr>
-              <a:t>เกณฑ์ขั้นต่ำ: การทายว่า "ไม่ยกเลิก" ทุกรายการได้ Accuracy 62.9% แต่ F1 = 0 คือจับคนที่จะยกเลิกไม่ได้เลยแม้แต่รายเดียว โมเดลจึงต้องชนะเกณฑ์นี้ให้ได้</a:t>
+              <a:t>Baseline: Dummy Classifier ทายคลาสที่พบบ่อยที่สุดเสมอ ได้ Accuracy 62.9% แต่ F1 = 0 คือจับคนที่จะยกเลิกไม่ได้เลยแม้แต่รายเดียว</a:t>
             </a:r>
           </a:p>
         </p:txBody>
@@ -8212,7 +8476,183 @@
       </p:sp>
       <p:sp>
         <p:nvSpPr>
-          <p:cNvPr id="20" name="Rounded Rectangle 19"/>
+          <p:cNvPr id="20" name="TextBox 19"/>
+          <p:cNvSpPr txBox="1"/>
+          <p:nvPr/>
+        </p:nvSpPr>
+        <p:spPr>
+          <a:xfrm>
+            <a:off x="658368" y="2889504"/>
+            <a:ext cx="2093728" cy="329184"/>
+          </a:xfrm>
+          <a:prstGeom prst="rect">
+            <a:avLst/>
+          </a:prstGeom>
+          <a:noFill/>
+        </p:spPr>
+        <p:txBody>
+          <a:bodyPr wrap="square" lIns="0" rIns="0" tIns="0" bIns="0" anchor="t">
+            <a:spAutoFit/>
+          </a:bodyPr>
+          <a:lstStyle/>
+          <a:p>
+            <a:pPr algn="l">
+              <a:lnSpc>
+                <a:spcPct val="100000"/>
+              </a:lnSpc>
+              <a:spcAft>
+                <a:spcPts val="0"/>
+              </a:spcAft>
+            </a:pPr>
+            <a:r>
+              <a:rPr sz="1300" b="0">
+                <a:solidFill>
+                  <a:srgbClr val="1F2C3D"/>
+                </a:solidFill>
+                <a:latin typeface="Tahoma"/>
+                <a:ea typeface="Tahoma"/>
+                <a:cs typeface="Tahoma"/>
+              </a:rPr>
+              <a:t>HistGradientBoosting</a:t>
+            </a:r>
+          </a:p>
+        </p:txBody>
+      </p:sp>
+      <p:sp>
+        <p:nvSpPr>
+          <p:cNvPr id="21" name="TextBox 20"/>
+          <p:cNvSpPr txBox="1"/>
+          <p:nvPr/>
+        </p:nvSpPr>
+        <p:spPr>
+          <a:xfrm>
+            <a:off x="2971552" y="2889504"/>
+            <a:ext cx="937136" cy="329184"/>
+          </a:xfrm>
+          <a:prstGeom prst="rect">
+            <a:avLst/>
+          </a:prstGeom>
+          <a:noFill/>
+        </p:spPr>
+        <p:txBody>
+          <a:bodyPr wrap="square" lIns="0" rIns="0" tIns="0" bIns="0" anchor="t">
+            <a:spAutoFit/>
+          </a:bodyPr>
+          <a:lstStyle/>
+          <a:p>
+            <a:pPr algn="ctr">
+              <a:lnSpc>
+                <a:spcPct val="100000"/>
+              </a:lnSpc>
+              <a:spcAft>
+                <a:spcPts val="0"/>
+              </a:spcAft>
+            </a:pPr>
+            <a:r>
+              <a:rPr sz="1300" b="0">
+                <a:solidFill>
+                  <a:srgbClr val="1F2C3D"/>
+                </a:solidFill>
+                <a:latin typeface="Tahoma"/>
+                <a:ea typeface="Tahoma"/>
+                <a:cs typeface="Tahoma"/>
+              </a:rPr>
+              <a:t>0.8112</a:t>
+            </a:r>
+          </a:p>
+        </p:txBody>
+      </p:sp>
+      <p:sp>
+        <p:nvSpPr>
+          <p:cNvPr id="22" name="TextBox 21"/>
+          <p:cNvSpPr txBox="1"/>
+          <p:nvPr/>
+        </p:nvSpPr>
+        <p:spPr>
+          <a:xfrm>
+            <a:off x="4128144" y="2889504"/>
+            <a:ext cx="937136" cy="329184"/>
+          </a:xfrm>
+          <a:prstGeom prst="rect">
+            <a:avLst/>
+          </a:prstGeom>
+          <a:noFill/>
+        </p:spPr>
+        <p:txBody>
+          <a:bodyPr wrap="square" lIns="0" rIns="0" tIns="0" bIns="0" anchor="t">
+            <a:spAutoFit/>
+          </a:bodyPr>
+          <a:lstStyle/>
+          <a:p>
+            <a:pPr algn="ctr">
+              <a:lnSpc>
+                <a:spcPct val="100000"/>
+              </a:lnSpc>
+              <a:spcAft>
+                <a:spcPts val="0"/>
+              </a:spcAft>
+            </a:pPr>
+            <a:r>
+              <a:rPr sz="1300" b="1">
+                <a:solidFill>
+                  <a:srgbClr val="0F2038"/>
+                </a:solidFill>
+                <a:latin typeface="Tahoma"/>
+                <a:ea typeface="Tahoma"/>
+                <a:cs typeface="Tahoma"/>
+              </a:rPr>
+              <a:t>0.8344</a:t>
+            </a:r>
+          </a:p>
+        </p:txBody>
+      </p:sp>
+      <p:sp>
+        <p:nvSpPr>
+          <p:cNvPr id="23" name="TextBox 22"/>
+          <p:cNvSpPr txBox="1"/>
+          <p:nvPr/>
+        </p:nvSpPr>
+        <p:spPr>
+          <a:xfrm>
+            <a:off x="5284736" y="2889504"/>
+            <a:ext cx="1737854" cy="329184"/>
+          </a:xfrm>
+          <a:prstGeom prst="rect">
+            <a:avLst/>
+          </a:prstGeom>
+          <a:noFill/>
+        </p:spPr>
+        <p:txBody>
+          <a:bodyPr wrap="square" lIns="0" rIns="0" tIns="0" bIns="0" anchor="t">
+            <a:spAutoFit/>
+          </a:bodyPr>
+          <a:lstStyle/>
+          <a:p>
+            <a:pPr algn="ctr">
+              <a:lnSpc>
+                <a:spcPct val="100000"/>
+              </a:lnSpc>
+              <a:spcAft>
+                <a:spcPts val="0"/>
+              </a:spcAft>
+            </a:pPr>
+            <a:r>
+              <a:rPr sz="1300" b="0">
+                <a:solidFill>
+                  <a:srgbClr val="1F2C3D"/>
+                </a:solidFill>
+                <a:latin typeface="Tahoma"/>
+                <a:ea typeface="Tahoma"/>
+                <a:cs typeface="Tahoma"/>
+              </a:rPr>
+              <a:t>0.011 → 0.062</a:t>
+            </a:r>
+          </a:p>
+        </p:txBody>
+      </p:sp>
+      <p:sp>
+        <p:nvSpPr>
+          <p:cNvPr id="24" name="Rounded Rectangle 23"/>
           <p:cNvSpPr/>
           <p:nvPr/>
         </p:nvSpPr>
@@ -8258,7 +8698,7 @@
       </p:sp>
       <p:sp>
         <p:nvSpPr>
-          <p:cNvPr id="21" name="TextBox 20"/>
+          <p:cNvPr id="25" name="TextBox 24"/>
           <p:cNvSpPr txBox="1"/>
           <p:nvPr/>
         </p:nvSpPr>
@@ -8334,7 +8774,7 @@
       </p:sp>
       <p:sp>
         <p:nvSpPr>
-          <p:cNvPr id="22" name="TextBox 21"/>
+          <p:cNvPr id="26" name="TextBox 25"/>
           <p:cNvSpPr txBox="1"/>
           <p:nvPr/>
         </p:nvSpPr>
@@ -8399,7 +8839,7 @@
       </p:sp>
       <p:pic>
         <p:nvPicPr>
-          <p:cNvPr id="23" name="Picture 22" descr="7_validation_curve_rf_max_depth.png"/>
+          <p:cNvPr id="27" name="Picture 26" descr="7_validation_curve_rf_max_depth.png"/>
           <p:cNvPicPr>
             <a:picLocks noChangeAspect="1"/>
           </p:cNvPicPr>
@@ -8423,7 +8863,7 @@
       </p:pic>
       <p:sp>
         <p:nvSpPr>
-          <p:cNvPr id="24" name="TextBox 23"/>
+          <p:cNvPr id="28" name="TextBox 27"/>
           <p:cNvSpPr txBox="1"/>
           <p:nvPr/>
         </p:nvSpPr>
@@ -11085,7 +11525,7 @@
                 <a:ea typeface="Tahoma"/>
                 <a:cs typeface="Tahoma"/>
               </a:rPr>
-              <a:t>100%</a:t>
+              <a:t>99.8%</a:t>
             </a:r>
           </a:p>
         </p:txBody>
@@ -11264,7 +11704,7 @@
                 <a:ea typeface="Tahoma"/>
                 <a:cs typeface="Tahoma"/>
               </a:rPr>
-              <a:t>33.3%</a:t>
+              <a:t>25.9%</a:t>
             </a:r>
           </a:p>
         </p:txBody>
@@ -11443,7 +11883,7 @@
                 <a:ea typeface="Tahoma"/>
                 <a:cs typeface="Tahoma"/>
               </a:rPr>
-              <a:t>0.6%</a:t>
+              <a:t>1.0%</a:t>
             </a:r>
           </a:p>
         </p:txBody>
@@ -11643,7 +12083,7 @@
                 <a:ea typeface="Tahoma"/>
                 <a:cs typeface="Tahoma"/>
               </a:rPr>
-              <a:t>โมเดลบนเว็บเป็น Random Forest ฉบับย่อ 28.8 MB (F1 0.8376) แทนตัวเต็ม 356.8 MB เพราะข้อจำกัดด้านหน่วยความจำของบริการฟรี · ผลทำนายอิงข้อมูลโปรตุเกสปี 2015–2017</a:t>
+              <a:t>โมเดลบนเว็บใช้ HistGradientBoosting ขนาด 0.8 MB (F1 0.8334) แทน Random Forest 356.8 MB เพราะข้อจำกัดด้านหน่วยความจำของบริการฟรี · ผลทำนายอิงข้อมูลโปรตุเกสปี 2015–2017</a:t>
             </a:r>
           </a:p>
         </p:txBody>
@@ -19588,7 +20028,7 @@
                 <a:ea typeface="Tahoma"/>
                 <a:cs typeface="Tahoma"/>
               </a:rPr>
-              <a:t>0.8416 ± 0.0037</a:t>
+              <a:t>0.8103 ± 0.0049</a:t>
             </a:r>
           </a:p>
         </p:txBody>
@@ -19632,7 +20072,7 @@
                 <a:ea typeface="Tahoma"/>
                 <a:cs typeface="Tahoma"/>
               </a:rPr>
-              <a:t>0.9551</a:t>
+              <a:t>0.9420</a:t>
             </a:r>
           </a:p>
         </p:txBody>
@@ -19808,7 +20248,7 @@
                 <a:ea typeface="Tahoma"/>
                 <a:cs typeface="Tahoma"/>
               </a:rPr>
-              <a:t>0.8427 ± 0.0028</a:t>
+              <a:t>0.8127 ± 0.0042</a:t>
             </a:r>
           </a:p>
         </p:txBody>
@@ -19852,7 +20292,7 @@
                 <a:ea typeface="Tahoma"/>
                 <a:cs typeface="Tahoma"/>
               </a:rPr>
-              <a:t>0.9554</a:t>
+              <a:t>0.9428</a:t>
             </a:r>
           </a:p>
         </p:txBody>
@@ -20028,7 +20468,7 @@
                 <a:ea typeface="Tahoma"/>
                 <a:cs typeface="Tahoma"/>
               </a:rPr>
-              <a:t>0.8421 ± 0.0036</a:t>
+              <a:t>0.8112 ± 0.0027</a:t>
             </a:r>
           </a:p>
         </p:txBody>
@@ -20072,7 +20512,7 @@
                 <a:ea typeface="Tahoma"/>
                 <a:cs typeface="Tahoma"/>
               </a:rPr>
-              <a:t>0.9546</a:t>
+              <a:t>0.9417</a:t>
             </a:r>
           </a:p>
         </p:txBody>
@@ -20162,7 +20602,7 @@
                 <a:ea typeface="Tahoma"/>
                 <a:cs typeface="Tahoma"/>
               </a:rPr>
-              <a:t>ผลต่างระหว่าง B กับ C = 0.0006 </a:t>
+              <a:t>ผลต่างระหว่าง B กับ C = 0.0015 </a:t>
             </a:r>
             <a:r>
               <a:rPr sz="1400" b="0">
@@ -20173,7 +20613,7 @@
                 <a:ea typeface="Tahoma"/>
                 <a:cs typeface="Tahoma"/>
               </a:rPr>
-              <a:t>ซึ่งน้อยกว่าค่า std (0.0028)</a:t>
+              <a:t>ซึ่งน้อยกว่าค่า std (0.0042)</a:t>
             </a:r>
           </a:p>
           <a:p>
@@ -20194,7 +20634,7 @@
                 <a:ea typeface="Tahoma"/>
                 <a:cs typeface="Tahoma"/>
               </a:rPr>
-              <a:t>→ ไม่ต่างกันอย่างมีนัยสำคัญ แต่ C ใช้ feature ครึ่งเดียวและเทรนเร็วขึ้นเท่าตัว (8.7 vs 17.5 วินาที)</a:t>
+              <a:t>→ ถือว่าไม่ต่างกันอย่างมีนัยสำคัญ แต่ C มีความแปรปรวนต่ำที่สุดและเทรนเร็วที่สุด จึงเลือก C</a:t>
             </a:r>
           </a:p>
         </p:txBody>
@@ -20215,8 +20655,8 @@
         </p:blipFill>
         <p:spPr>
           <a:xfrm>
-            <a:off x="7589520" y="1991360"/>
-            <a:ext cx="4023360" cy="2235200"/>
+            <a:off x="7589520" y="2010029"/>
+            <a:ext cx="4023360" cy="2197862"/>
           </a:xfrm>
           <a:prstGeom prst="rect">
             <a:avLst/>

--- a/slides/Hotel-Booking-Cancellation-Prediction.pptx
+++ b/slides/Hotel-Booking-Cancellation-Prediction.pptx
@@ -11525,7 +11525,7 @@
                 <a:ea typeface="Tahoma"/>
                 <a:cs typeface="Tahoma"/>
               </a:rPr>
-              <a:t>99.8%</a:t>
+              <a:t>100%</a:t>
             </a:r>
           </a:p>
         </p:txBody>
@@ -11704,7 +11704,7 @@
                 <a:ea typeface="Tahoma"/>
                 <a:cs typeface="Tahoma"/>
               </a:rPr>
-              <a:t>25.9%</a:t>
+              <a:t>33.3%</a:t>
             </a:r>
           </a:p>
         </p:txBody>
@@ -11883,7 +11883,7 @@
                 <a:ea typeface="Tahoma"/>
                 <a:cs typeface="Tahoma"/>
               </a:rPr>
-              <a:t>1.0%</a:t>
+              <a:t>0.6%</a:t>
             </a:r>
           </a:p>
         </p:txBody>
@@ -12083,7 +12083,7 @@
                 <a:ea typeface="Tahoma"/>
                 <a:cs typeface="Tahoma"/>
               </a:rPr>
-              <a:t>โมเดลบนเว็บใช้ HistGradientBoosting ขนาด 0.8 MB (F1 0.8334) แทน Random Forest 356.8 MB เพราะข้อจำกัดด้านหน่วยความจำของบริการฟรี · ผลทำนายอิงข้อมูลโปรตุเกสปี 2015–2017</a:t>
+              <a:t>โมเดลบนเว็บเป็น Random Forest ฉบับย่อ 28.8 MB (F1 0.8376) แทนตัวเต็ม 356.8 MB เพราะข้อจำกัดด้านหน่วยความจำของบริการฟรี · ผลทำนายอิงข้อมูลโปรตุเกสปี 2015–2017</a:t>
             </a:r>
           </a:p>
         </p:txBody>
